--- a/docs/pptx/carbo/ritu-carbo-linsubhr-dosedisc-anyhosp.pptx
+++ b/docs/pptx/carbo/ritu-carbo-linsubhr-dosedisc-anyhosp.pptx
@@ -2443,7 +2443,7 @@
           </p:nvSpPr>
           <p:spPr>
             <a:xfrm>
-              <a:off x="909675" y="1896563"/>
+              <a:off x="911833" y="1896563"/>
               <a:ext cx="0" cy="3826579"/>
             </a:xfrm>
             <a:custGeom>
@@ -2486,7 +2486,7 @@
           </p:nvSpPr>
           <p:spPr>
             <a:xfrm>
-              <a:off x="3323794" y="1896563"/>
+              <a:off x="3322810" y="1896563"/>
               <a:ext cx="0" cy="3826579"/>
             </a:xfrm>
             <a:custGeom>
@@ -2529,7 +2529,7 @@
           </p:nvSpPr>
           <p:spPr>
             <a:xfrm>
-              <a:off x="5737913" y="1896563"/>
+              <a:off x="5733788" y="1896563"/>
               <a:ext cx="0" cy="3826579"/>
             </a:xfrm>
             <a:custGeom>
@@ -2572,7 +2572,7 @@
           </p:nvSpPr>
           <p:spPr>
             <a:xfrm>
-              <a:off x="8152032" y="1896563"/>
+              <a:off x="8144765" y="1896563"/>
               <a:ext cx="0" cy="3826579"/>
             </a:xfrm>
             <a:custGeom>
@@ -2830,7 +2830,7 @@
           </p:nvSpPr>
           <p:spPr>
             <a:xfrm>
-              <a:off x="2116734" y="1896563"/>
+              <a:off x="2117321" y="1896563"/>
               <a:ext cx="0" cy="3826579"/>
             </a:xfrm>
             <a:custGeom>
@@ -2873,7 +2873,7 @@
           </p:nvSpPr>
           <p:spPr>
             <a:xfrm>
-              <a:off x="4530853" y="1896563"/>
+              <a:off x="4528299" y="1896563"/>
               <a:ext cx="0" cy="3826579"/>
             </a:xfrm>
             <a:custGeom>
@@ -2916,7 +2916,7 @@
           </p:nvSpPr>
           <p:spPr>
             <a:xfrm>
-              <a:off x="6944973" y="1896563"/>
+              <a:off x="6939276" y="1896563"/>
               <a:ext cx="0" cy="3826579"/>
             </a:xfrm>
             <a:custGeom>
@@ -2959,612 +2959,612 @@
           </p:nvSpPr>
           <p:spPr>
             <a:xfrm>
-              <a:off x="1172049" y="2393690"/>
-              <a:ext cx="7090630" cy="2872362"/>
+              <a:off x="1172049" y="2403215"/>
+              <a:ext cx="7090630" cy="2860564"/>
             </a:xfrm>
             <a:custGeom>
               <a:avLst/>
               <a:pathLst>
-                <a:path w="7090630" h="2872362">
+                <a:path w="7090630" h="2860564">
                   <a:moveTo>
-                    <a:pt x="0" y="1716551"/>
+                    <a:pt x="0" y="1700006"/>
                   </a:moveTo>
                   <a:lnTo>
-                    <a:pt x="71622" y="1732191"/>
-                  </a:lnTo>
-                  <a:lnTo>
-                    <a:pt x="143245" y="1747661"/>
-                  </a:lnTo>
-                  <a:lnTo>
-                    <a:pt x="214867" y="1762963"/>
-                  </a:lnTo>
-                  <a:lnTo>
-                    <a:pt x="286490" y="1778098"/>
-                  </a:lnTo>
-                  <a:lnTo>
-                    <a:pt x="358112" y="1793069"/>
-                  </a:lnTo>
-                  <a:lnTo>
-                    <a:pt x="429735" y="1807877"/>
-                  </a:lnTo>
-                  <a:lnTo>
-                    <a:pt x="501357" y="1822524"/>
-                  </a:lnTo>
-                  <a:lnTo>
-                    <a:pt x="572980" y="1837012"/>
-                  </a:lnTo>
-                  <a:lnTo>
-                    <a:pt x="644602" y="1851343"/>
-                  </a:lnTo>
-                  <a:lnTo>
-                    <a:pt x="716225" y="1865518"/>
-                  </a:lnTo>
-                  <a:lnTo>
-                    <a:pt x="787847" y="1879538"/>
-                  </a:lnTo>
-                  <a:lnTo>
-                    <a:pt x="859470" y="1893407"/>
-                  </a:lnTo>
-                  <a:lnTo>
-                    <a:pt x="931092" y="1907124"/>
-                  </a:lnTo>
-                  <a:lnTo>
-                    <a:pt x="1002715" y="1920693"/>
-                  </a:lnTo>
-                  <a:lnTo>
-                    <a:pt x="1074337" y="1934114"/>
-                  </a:lnTo>
-                  <a:lnTo>
-                    <a:pt x="1145960" y="1947389"/>
-                  </a:lnTo>
-                  <a:lnTo>
-                    <a:pt x="1217582" y="1960520"/>
-                  </a:lnTo>
-                  <a:lnTo>
-                    <a:pt x="1289205" y="1973508"/>
-                  </a:lnTo>
-                  <a:lnTo>
-                    <a:pt x="1360827" y="1986355"/>
-                  </a:lnTo>
-                  <a:lnTo>
-                    <a:pt x="1432450" y="1999063"/>
-                  </a:lnTo>
-                  <a:lnTo>
-                    <a:pt x="1504073" y="2011632"/>
-                  </a:lnTo>
-                  <a:lnTo>
-                    <a:pt x="1575695" y="2024065"/>
-                  </a:lnTo>
-                  <a:lnTo>
-                    <a:pt x="1647318" y="2036362"/>
-                  </a:lnTo>
-                  <a:lnTo>
-                    <a:pt x="1718940" y="2048526"/>
-                  </a:lnTo>
-                  <a:lnTo>
-                    <a:pt x="1790563" y="2060558"/>
-                  </a:lnTo>
-                  <a:lnTo>
-                    <a:pt x="1862185" y="2072459"/>
-                  </a:lnTo>
-                  <a:lnTo>
-                    <a:pt x="1933808" y="2084230"/>
-                  </a:lnTo>
-                  <a:lnTo>
-                    <a:pt x="2005430" y="2095874"/>
-                  </a:lnTo>
-                  <a:lnTo>
-                    <a:pt x="2077053" y="2107391"/>
-                  </a:lnTo>
-                  <a:lnTo>
-                    <a:pt x="2148675" y="2118783"/>
-                  </a:lnTo>
-                  <a:lnTo>
-                    <a:pt x="2220298" y="2130051"/>
-                  </a:lnTo>
-                  <a:lnTo>
-                    <a:pt x="2291920" y="2141196"/>
-                  </a:lnTo>
-                  <a:lnTo>
-                    <a:pt x="2363543" y="2152221"/>
-                  </a:lnTo>
-                  <a:lnTo>
-                    <a:pt x="2435165" y="2163125"/>
-                  </a:lnTo>
-                  <a:lnTo>
-                    <a:pt x="2506788" y="2173912"/>
-                  </a:lnTo>
-                  <a:lnTo>
-                    <a:pt x="2578410" y="2184580"/>
-                  </a:lnTo>
-                  <a:lnTo>
-                    <a:pt x="2650033" y="2195133"/>
-                  </a:lnTo>
-                  <a:lnTo>
-                    <a:pt x="2721655" y="2205572"/>
-                  </a:lnTo>
-                  <a:lnTo>
-                    <a:pt x="2793278" y="2215896"/>
-                  </a:lnTo>
-                  <a:lnTo>
-                    <a:pt x="2864901" y="2226109"/>
-                  </a:lnTo>
-                  <a:lnTo>
-                    <a:pt x="2936523" y="2236210"/>
-                  </a:lnTo>
-                  <a:lnTo>
-                    <a:pt x="3008146" y="2246202"/>
-                  </a:lnTo>
-                  <a:lnTo>
-                    <a:pt x="3079768" y="2256085"/>
-                  </a:lnTo>
-                  <a:lnTo>
-                    <a:pt x="3151391" y="2265861"/>
-                  </a:lnTo>
-                  <a:lnTo>
-                    <a:pt x="3223013" y="2275531"/>
-                  </a:lnTo>
-                  <a:lnTo>
-                    <a:pt x="3294636" y="2285095"/>
-                  </a:lnTo>
-                  <a:lnTo>
-                    <a:pt x="3366258" y="2266098"/>
-                  </a:lnTo>
-                  <a:lnTo>
-                    <a:pt x="3437881" y="2244172"/>
-                  </a:lnTo>
-                  <a:lnTo>
-                    <a:pt x="3509503" y="2221706"/>
-                  </a:lnTo>
-                  <a:lnTo>
-                    <a:pt x="3581126" y="2198686"/>
-                  </a:lnTo>
-                  <a:lnTo>
-                    <a:pt x="3652748" y="2175099"/>
-                  </a:lnTo>
-                  <a:lnTo>
-                    <a:pt x="3724371" y="2150930"/>
-                  </a:lnTo>
-                  <a:lnTo>
-                    <a:pt x="3795993" y="2126165"/>
-                  </a:lnTo>
-                  <a:lnTo>
-                    <a:pt x="3867616" y="2100790"/>
-                  </a:lnTo>
-                  <a:lnTo>
-                    <a:pt x="3939238" y="2074789"/>
-                  </a:lnTo>
-                  <a:lnTo>
-                    <a:pt x="4010861" y="2048148"/>
-                  </a:lnTo>
-                  <a:lnTo>
-                    <a:pt x="4082483" y="2020849"/>
-                  </a:lnTo>
-                  <a:lnTo>
-                    <a:pt x="4154106" y="1992878"/>
-                  </a:lnTo>
-                  <a:lnTo>
-                    <a:pt x="4225729" y="1964217"/>
-                  </a:lnTo>
-                  <a:lnTo>
-                    <a:pt x="4297351" y="1934849"/>
-                  </a:lnTo>
-                  <a:lnTo>
-                    <a:pt x="4368974" y="1904758"/>
-                  </a:lnTo>
-                  <a:lnTo>
-                    <a:pt x="4440596" y="1873925"/>
-                  </a:lnTo>
-                  <a:lnTo>
-                    <a:pt x="4512219" y="1842331"/>
-                  </a:lnTo>
-                  <a:lnTo>
-                    <a:pt x="4583841" y="1809959"/>
-                  </a:lnTo>
-                  <a:lnTo>
-                    <a:pt x="4655464" y="1776789"/>
-                  </a:lnTo>
-                  <a:lnTo>
-                    <a:pt x="4727086" y="1742801"/>
-                  </a:lnTo>
-                  <a:lnTo>
-                    <a:pt x="4798709" y="1707975"/>
-                  </a:lnTo>
-                  <a:lnTo>
-                    <a:pt x="4870331" y="1672291"/>
-                  </a:lnTo>
-                  <a:lnTo>
-                    <a:pt x="4941954" y="1635727"/>
-                  </a:lnTo>
-                  <a:lnTo>
-                    <a:pt x="5013576" y="1598262"/>
-                  </a:lnTo>
-                  <a:lnTo>
-                    <a:pt x="5085199" y="1559873"/>
-                  </a:lnTo>
-                  <a:lnTo>
-                    <a:pt x="5156821" y="1520538"/>
-                  </a:lnTo>
-                  <a:lnTo>
-                    <a:pt x="5228444" y="1480233"/>
-                  </a:lnTo>
-                  <a:lnTo>
-                    <a:pt x="5300066" y="1438934"/>
-                  </a:lnTo>
-                  <a:lnTo>
-                    <a:pt x="5371689" y="1396618"/>
-                  </a:lnTo>
-                  <a:lnTo>
-                    <a:pt x="5443311" y="1353258"/>
-                  </a:lnTo>
-                  <a:lnTo>
-                    <a:pt x="5514934" y="1308829"/>
-                  </a:lnTo>
-                  <a:lnTo>
-                    <a:pt x="5586557" y="1263306"/>
-                  </a:lnTo>
-                  <a:lnTo>
-                    <a:pt x="5658179" y="1216659"/>
-                  </a:lnTo>
-                  <a:lnTo>
-                    <a:pt x="5729802" y="1168863"/>
-                  </a:lnTo>
-                  <a:lnTo>
-                    <a:pt x="5801424" y="1119889"/>
-                  </a:lnTo>
-                  <a:lnTo>
-                    <a:pt x="5873047" y="1069708"/>
-                  </a:lnTo>
-                  <a:lnTo>
-                    <a:pt x="5944669" y="1018289"/>
-                  </a:lnTo>
-                  <a:lnTo>
-                    <a:pt x="6016292" y="965603"/>
-                  </a:lnTo>
-                  <a:lnTo>
-                    <a:pt x="6087914" y="911618"/>
-                  </a:lnTo>
-                  <a:lnTo>
-                    <a:pt x="6159537" y="856302"/>
-                  </a:lnTo>
-                  <a:lnTo>
-                    <a:pt x="6231159" y="799623"/>
-                  </a:lnTo>
-                  <a:lnTo>
-                    <a:pt x="6302782" y="741546"/>
-                  </a:lnTo>
-                  <a:lnTo>
-                    <a:pt x="6374404" y="682038"/>
-                  </a:lnTo>
-                  <a:lnTo>
-                    <a:pt x="6446027" y="621063"/>
-                  </a:lnTo>
-                  <a:lnTo>
-                    <a:pt x="6517649" y="558584"/>
-                  </a:lnTo>
-                  <a:lnTo>
-                    <a:pt x="6589272" y="494566"/>
-                  </a:lnTo>
-                  <a:lnTo>
-                    <a:pt x="6660894" y="428969"/>
-                  </a:lnTo>
-                  <a:lnTo>
-                    <a:pt x="6732517" y="361755"/>
-                  </a:lnTo>
-                  <a:lnTo>
-                    <a:pt x="6804139" y="292884"/>
-                  </a:lnTo>
-                  <a:lnTo>
-                    <a:pt x="6875762" y="222316"/>
-                  </a:lnTo>
-                  <a:lnTo>
-                    <a:pt x="6947385" y="150007"/>
-                  </a:lnTo>
-                  <a:lnTo>
-                    <a:pt x="7019007" y="75917"/>
+                    <a:pt x="71622" y="1715914"/>
+                  </a:lnTo>
+                  <a:lnTo>
+                    <a:pt x="143245" y="1731647"/>
+                  </a:lnTo>
+                  <a:lnTo>
+                    <a:pt x="214867" y="1747206"/>
+                  </a:lnTo>
+                  <a:lnTo>
+                    <a:pt x="286490" y="1762595"/>
+                  </a:lnTo>
+                  <a:lnTo>
+                    <a:pt x="358112" y="1777814"/>
+                  </a:lnTo>
+                  <a:lnTo>
+                    <a:pt x="429735" y="1792866"/>
+                  </a:lnTo>
+                  <a:lnTo>
+                    <a:pt x="501357" y="1807752"/>
+                  </a:lnTo>
+                  <a:lnTo>
+                    <a:pt x="572980" y="1822475"/>
+                  </a:lnTo>
+                  <a:lnTo>
+                    <a:pt x="644602" y="1837035"/>
+                  </a:lnTo>
+                  <a:lnTo>
+                    <a:pt x="716225" y="1851435"/>
+                  </a:lnTo>
+                  <a:lnTo>
+                    <a:pt x="787847" y="1865677"/>
+                  </a:lnTo>
+                  <a:lnTo>
+                    <a:pt x="859470" y="1879762"/>
+                  </a:lnTo>
+                  <a:lnTo>
+                    <a:pt x="931092" y="1893693"/>
+                  </a:lnTo>
+                  <a:lnTo>
+                    <a:pt x="1002715" y="1907470"/>
+                  </a:lnTo>
+                  <a:lnTo>
+                    <a:pt x="1074337" y="1921095"/>
+                  </a:lnTo>
+                  <a:lnTo>
+                    <a:pt x="1145960" y="1934570"/>
+                  </a:lnTo>
+                  <a:lnTo>
+                    <a:pt x="1217582" y="1947898"/>
+                  </a:lnTo>
+                  <a:lnTo>
+                    <a:pt x="1289205" y="1961078"/>
+                  </a:lnTo>
+                  <a:lnTo>
+                    <a:pt x="1360827" y="1974114"/>
+                  </a:lnTo>
+                  <a:lnTo>
+                    <a:pt x="1432450" y="1987006"/>
+                  </a:lnTo>
+                  <a:lnTo>
+                    <a:pt x="1504073" y="1999757"/>
+                  </a:lnTo>
+                  <a:lnTo>
+                    <a:pt x="1575695" y="2012367"/>
+                  </a:lnTo>
+                  <a:lnTo>
+                    <a:pt x="1647318" y="2024838"/>
+                  </a:lnTo>
+                  <a:lnTo>
+                    <a:pt x="1718940" y="2037172"/>
+                  </a:lnTo>
+                  <a:lnTo>
+                    <a:pt x="1790563" y="2049371"/>
+                  </a:lnTo>
+                  <a:lnTo>
+                    <a:pt x="1862185" y="2061435"/>
+                  </a:lnTo>
+                  <a:lnTo>
+                    <a:pt x="1933808" y="2073367"/>
+                  </a:lnTo>
+                  <a:lnTo>
+                    <a:pt x="2005430" y="2085167"/>
+                  </a:lnTo>
+                  <a:lnTo>
+                    <a:pt x="2077053" y="2096837"/>
+                  </a:lnTo>
+                  <a:lnTo>
+                    <a:pt x="2148675" y="2108380"/>
+                  </a:lnTo>
+                  <a:lnTo>
+                    <a:pt x="2220298" y="2119795"/>
+                  </a:lnTo>
+                  <a:lnTo>
+                    <a:pt x="2291920" y="2131084"/>
+                  </a:lnTo>
+                  <a:lnTo>
+                    <a:pt x="2363543" y="2142250"/>
+                  </a:lnTo>
+                  <a:lnTo>
+                    <a:pt x="2435165" y="2153292"/>
+                  </a:lnTo>
+                  <a:lnTo>
+                    <a:pt x="2506788" y="2164213"/>
+                  </a:lnTo>
+                  <a:lnTo>
+                    <a:pt x="2578410" y="2175014"/>
+                  </a:lnTo>
+                  <a:lnTo>
+                    <a:pt x="2650033" y="2185696"/>
+                  </a:lnTo>
+                  <a:lnTo>
+                    <a:pt x="2721655" y="2196261"/>
+                  </a:lnTo>
+                  <a:lnTo>
+                    <a:pt x="2793278" y="2206709"/>
+                  </a:lnTo>
+                  <a:lnTo>
+                    <a:pt x="2864901" y="2217042"/>
+                  </a:lnTo>
+                  <a:lnTo>
+                    <a:pt x="2936523" y="2227262"/>
+                  </a:lnTo>
+                  <a:lnTo>
+                    <a:pt x="3008146" y="2237369"/>
+                  </a:lnTo>
+                  <a:lnTo>
+                    <a:pt x="3079768" y="2247365"/>
+                  </a:lnTo>
+                  <a:lnTo>
+                    <a:pt x="3151391" y="2257251"/>
+                  </a:lnTo>
+                  <a:lnTo>
+                    <a:pt x="3223013" y="2267029"/>
+                  </a:lnTo>
+                  <a:lnTo>
+                    <a:pt x="3294636" y="2275472"/>
+                  </a:lnTo>
+                  <a:lnTo>
+                    <a:pt x="3366258" y="2254111"/>
+                  </a:lnTo>
+                  <a:lnTo>
+                    <a:pt x="3437881" y="2232227"/>
+                  </a:lnTo>
+                  <a:lnTo>
+                    <a:pt x="3509503" y="2209805"/>
+                  </a:lnTo>
+                  <a:lnTo>
+                    <a:pt x="3581126" y="2186833"/>
+                  </a:lnTo>
+                  <a:lnTo>
+                    <a:pt x="3652748" y="2163298"/>
+                  </a:lnTo>
+                  <a:lnTo>
+                    <a:pt x="3724371" y="2139185"/>
+                  </a:lnTo>
+                  <a:lnTo>
+                    <a:pt x="3795993" y="2114480"/>
+                  </a:lnTo>
+                  <a:lnTo>
+                    <a:pt x="3867616" y="2089169"/>
+                  </a:lnTo>
+                  <a:lnTo>
+                    <a:pt x="3939238" y="2063237"/>
+                  </a:lnTo>
+                  <a:lnTo>
+                    <a:pt x="4010861" y="2036669"/>
+                  </a:lnTo>
+                  <a:lnTo>
+                    <a:pt x="4082483" y="2009449"/>
+                  </a:lnTo>
+                  <a:lnTo>
+                    <a:pt x="4154106" y="1981561"/>
+                  </a:lnTo>
+                  <a:lnTo>
+                    <a:pt x="4225729" y="1952989"/>
+                  </a:lnTo>
+                  <a:lnTo>
+                    <a:pt x="4297351" y="1923715"/>
+                  </a:lnTo>
+                  <a:lnTo>
+                    <a:pt x="4368974" y="1893724"/>
+                  </a:lnTo>
+                  <a:lnTo>
+                    <a:pt x="4440596" y="1862996"/>
+                  </a:lnTo>
+                  <a:lnTo>
+                    <a:pt x="4512219" y="1831514"/>
+                  </a:lnTo>
+                  <a:lnTo>
+                    <a:pt x="4583841" y="1799260"/>
+                  </a:lnTo>
+                  <a:lnTo>
+                    <a:pt x="4655464" y="1766215"/>
+                  </a:lnTo>
+                  <a:lnTo>
+                    <a:pt x="4727086" y="1732358"/>
+                  </a:lnTo>
+                  <a:lnTo>
+                    <a:pt x="4798709" y="1697671"/>
+                  </a:lnTo>
+                  <a:lnTo>
+                    <a:pt x="4870331" y="1662133"/>
+                  </a:lnTo>
+                  <a:lnTo>
+                    <a:pt x="4941954" y="1625722"/>
+                  </a:lnTo>
+                  <a:lnTo>
+                    <a:pt x="5013576" y="1588419"/>
+                  </a:lnTo>
+                  <a:lnTo>
+                    <a:pt x="5085199" y="1550199"/>
+                  </a:lnTo>
+                  <a:lnTo>
+                    <a:pt x="5156821" y="1511043"/>
+                  </a:lnTo>
+                  <a:lnTo>
+                    <a:pt x="5228444" y="1470925"/>
+                  </a:lnTo>
+                  <a:lnTo>
+                    <a:pt x="5300066" y="1429823"/>
+                  </a:lnTo>
+                  <a:lnTo>
+                    <a:pt x="5371689" y="1387712"/>
+                  </a:lnTo>
+                  <a:lnTo>
+                    <a:pt x="5443311" y="1344568"/>
+                  </a:lnTo>
+                  <a:lnTo>
+                    <a:pt x="5514934" y="1300365"/>
+                  </a:lnTo>
+                  <a:lnTo>
+                    <a:pt x="5586557" y="1255078"/>
+                  </a:lnTo>
+                  <a:lnTo>
+                    <a:pt x="5658179" y="1208680"/>
+                  </a:lnTo>
+                  <a:lnTo>
+                    <a:pt x="5729802" y="1161143"/>
+                  </a:lnTo>
+                  <a:lnTo>
+                    <a:pt x="5801424" y="1112439"/>
+                  </a:lnTo>
+                  <a:lnTo>
+                    <a:pt x="5873047" y="1062541"/>
+                  </a:lnTo>
+                  <a:lnTo>
+                    <a:pt x="5944669" y="1011418"/>
+                  </a:lnTo>
+                  <a:lnTo>
+                    <a:pt x="6016292" y="959041"/>
+                  </a:lnTo>
+                  <a:lnTo>
+                    <a:pt x="6087914" y="905378"/>
+                  </a:lnTo>
+                  <a:lnTo>
+                    <a:pt x="6159537" y="850399"/>
+                  </a:lnTo>
+                  <a:lnTo>
+                    <a:pt x="6231159" y="794070"/>
+                  </a:lnTo>
+                  <a:lnTo>
+                    <a:pt x="6302782" y="736360"/>
+                  </a:lnTo>
+                  <a:lnTo>
+                    <a:pt x="6374404" y="677233"/>
+                  </a:lnTo>
+                  <a:lnTo>
+                    <a:pt x="6446027" y="616656"/>
+                  </a:lnTo>
+                  <a:lnTo>
+                    <a:pt x="6517649" y="554592"/>
+                  </a:lnTo>
+                  <a:lnTo>
+                    <a:pt x="6589272" y="491005"/>
+                  </a:lnTo>
+                  <a:lnTo>
+                    <a:pt x="6660894" y="425858"/>
+                  </a:lnTo>
+                  <a:lnTo>
+                    <a:pt x="6732517" y="359113"/>
+                  </a:lnTo>
+                  <a:lnTo>
+                    <a:pt x="6804139" y="290729"/>
+                  </a:lnTo>
+                  <a:lnTo>
+                    <a:pt x="6875762" y="220668"/>
+                  </a:lnTo>
+                  <a:lnTo>
+                    <a:pt x="6947385" y="148888"/>
+                  </a:lnTo>
+                  <a:lnTo>
+                    <a:pt x="7019007" y="75346"/>
                   </a:lnTo>
                   <a:lnTo>
                     <a:pt x="7090630" y="0"/>
                   </a:lnTo>
                   <a:lnTo>
-                    <a:pt x="7090630" y="2667779"/>
-                  </a:lnTo>
-                  <a:lnTo>
-                    <a:pt x="7019007" y="2662420"/>
-                  </a:lnTo>
-                  <a:lnTo>
-                    <a:pt x="6947385" y="2657001"/>
-                  </a:lnTo>
-                  <a:lnTo>
-                    <a:pt x="6875762" y="2651524"/>
-                  </a:lnTo>
-                  <a:lnTo>
-                    <a:pt x="6804139" y="2645986"/>
-                  </a:lnTo>
-                  <a:lnTo>
-                    <a:pt x="6732517" y="2640387"/>
-                  </a:lnTo>
-                  <a:lnTo>
-                    <a:pt x="6660894" y="2634726"/>
-                  </a:lnTo>
-                  <a:lnTo>
-                    <a:pt x="6589272" y="2629004"/>
-                  </a:lnTo>
-                  <a:lnTo>
-                    <a:pt x="6517649" y="2623218"/>
-                  </a:lnTo>
-                  <a:lnTo>
-                    <a:pt x="6446027" y="2617369"/>
-                  </a:lnTo>
-                  <a:lnTo>
-                    <a:pt x="6374404" y="2611456"/>
-                  </a:lnTo>
-                  <a:lnTo>
-                    <a:pt x="6302782" y="2605478"/>
-                  </a:lnTo>
-                  <a:lnTo>
-                    <a:pt x="6231159" y="2599434"/>
-                  </a:lnTo>
-                  <a:lnTo>
-                    <a:pt x="6159537" y="2593323"/>
-                  </a:lnTo>
-                  <a:lnTo>
-                    <a:pt x="6087914" y="2587146"/>
-                  </a:lnTo>
-                  <a:lnTo>
-                    <a:pt x="6016292" y="2580900"/>
-                  </a:lnTo>
-                  <a:lnTo>
-                    <a:pt x="5944669" y="2574586"/>
-                  </a:lnTo>
-                  <a:lnTo>
-                    <a:pt x="5873047" y="2568203"/>
-                  </a:lnTo>
-                  <a:lnTo>
-                    <a:pt x="5801424" y="2561750"/>
-                  </a:lnTo>
-                  <a:lnTo>
-                    <a:pt x="5729802" y="2555225"/>
-                  </a:lnTo>
-                  <a:lnTo>
-                    <a:pt x="5658179" y="2548629"/>
-                  </a:lnTo>
-                  <a:lnTo>
-                    <a:pt x="5586557" y="2541960"/>
-                  </a:lnTo>
-                  <a:lnTo>
-                    <a:pt x="5514934" y="2535218"/>
-                  </a:lnTo>
-                  <a:lnTo>
-                    <a:pt x="5443311" y="2528402"/>
-                  </a:lnTo>
-                  <a:lnTo>
-                    <a:pt x="5371689" y="2521512"/>
-                  </a:lnTo>
-                  <a:lnTo>
-                    <a:pt x="5300066" y="2514545"/>
-                  </a:lnTo>
-                  <a:lnTo>
-                    <a:pt x="5228444" y="2507502"/>
-                  </a:lnTo>
-                  <a:lnTo>
-                    <a:pt x="5156821" y="2500381"/>
-                  </a:lnTo>
-                  <a:lnTo>
-                    <a:pt x="5085199" y="2493182"/>
-                  </a:lnTo>
-                  <a:lnTo>
-                    <a:pt x="5013576" y="2485905"/>
-                  </a:lnTo>
-                  <a:lnTo>
-                    <a:pt x="4941954" y="2478547"/>
-                  </a:lnTo>
-                  <a:lnTo>
-                    <a:pt x="4870331" y="2471108"/>
-                  </a:lnTo>
-                  <a:lnTo>
-                    <a:pt x="4798709" y="2463588"/>
-                  </a:lnTo>
-                  <a:lnTo>
-                    <a:pt x="4727086" y="2455985"/>
-                  </a:lnTo>
-                  <a:lnTo>
-                    <a:pt x="4655464" y="2448298"/>
-                  </a:lnTo>
-                  <a:lnTo>
-                    <a:pt x="4583841" y="2440527"/>
-                  </a:lnTo>
-                  <a:lnTo>
-                    <a:pt x="4512219" y="2432670"/>
-                  </a:lnTo>
-                  <a:lnTo>
-                    <a:pt x="4440596" y="2424728"/>
-                  </a:lnTo>
-                  <a:lnTo>
-                    <a:pt x="4368974" y="2416697"/>
-                  </a:lnTo>
-                  <a:lnTo>
-                    <a:pt x="4297351" y="2408579"/>
-                  </a:lnTo>
-                  <a:lnTo>
-                    <a:pt x="4225729" y="2400372"/>
-                  </a:lnTo>
-                  <a:lnTo>
-                    <a:pt x="4154106" y="2392074"/>
-                  </a:lnTo>
-                  <a:lnTo>
-                    <a:pt x="4082483" y="2383685"/>
-                  </a:lnTo>
-                  <a:lnTo>
-                    <a:pt x="4010861" y="2375204"/>
-                  </a:lnTo>
-                  <a:lnTo>
-                    <a:pt x="3939238" y="2366630"/>
-                  </a:lnTo>
-                  <a:lnTo>
-                    <a:pt x="3867616" y="2357961"/>
-                  </a:lnTo>
-                  <a:lnTo>
-                    <a:pt x="3795993" y="2349197"/>
-                  </a:lnTo>
-                  <a:lnTo>
-                    <a:pt x="3724371" y="2340337"/>
-                  </a:lnTo>
-                  <a:lnTo>
-                    <a:pt x="3652748" y="2331380"/>
-                  </a:lnTo>
-                  <a:lnTo>
-                    <a:pt x="3581126" y="2322324"/>
-                  </a:lnTo>
-                  <a:lnTo>
-                    <a:pt x="3509503" y="2313169"/>
-                  </a:lnTo>
-                  <a:lnTo>
-                    <a:pt x="3437881" y="2303913"/>
-                  </a:lnTo>
-                  <a:lnTo>
-                    <a:pt x="3366258" y="2294555"/>
-                  </a:lnTo>
-                  <a:lnTo>
-                    <a:pt x="3294636" y="2287496"/>
-                  </a:lnTo>
-                  <a:lnTo>
-                    <a:pt x="3223013" y="2308379"/>
-                  </a:lnTo>
-                  <a:lnTo>
-                    <a:pt x="3151391" y="2328760"/>
-                  </a:lnTo>
-                  <a:lnTo>
-                    <a:pt x="3079768" y="2348651"/>
-                  </a:lnTo>
-                  <a:lnTo>
-                    <a:pt x="3008146" y="2368063"/>
-                  </a:lnTo>
-                  <a:lnTo>
-                    <a:pt x="2936523" y="2387008"/>
-                  </a:lnTo>
-                  <a:lnTo>
-                    <a:pt x="2864901" y="2405497"/>
-                  </a:lnTo>
-                  <a:lnTo>
-                    <a:pt x="2793278" y="2423541"/>
-                  </a:lnTo>
-                  <a:lnTo>
-                    <a:pt x="2721655" y="2441152"/>
-                  </a:lnTo>
-                  <a:lnTo>
-                    <a:pt x="2650033" y="2458338"/>
-                  </a:lnTo>
-                  <a:lnTo>
-                    <a:pt x="2578410" y="2475111"/>
-                  </a:lnTo>
-                  <a:lnTo>
-                    <a:pt x="2506788" y="2491481"/>
-                  </a:lnTo>
-                  <a:lnTo>
-                    <a:pt x="2435165" y="2507457"/>
-                  </a:lnTo>
-                  <a:lnTo>
-                    <a:pt x="2363543" y="2523048"/>
-                  </a:lnTo>
-                  <a:lnTo>
-                    <a:pt x="2291920" y="2538264"/>
-                  </a:lnTo>
-                  <a:lnTo>
-                    <a:pt x="2220298" y="2553115"/>
-                  </a:lnTo>
-                  <a:lnTo>
-                    <a:pt x="2148675" y="2567607"/>
-                  </a:lnTo>
-                  <a:lnTo>
-                    <a:pt x="2077053" y="2581752"/>
-                  </a:lnTo>
-                  <a:lnTo>
-                    <a:pt x="2005430" y="2595556"/>
-                  </a:lnTo>
-                  <a:lnTo>
-                    <a:pt x="1933808" y="2609027"/>
-                  </a:lnTo>
-                  <a:lnTo>
-                    <a:pt x="1862185" y="2622175"/>
-                  </a:lnTo>
-                  <a:lnTo>
-                    <a:pt x="1790563" y="2635007"/>
-                  </a:lnTo>
-                  <a:lnTo>
-                    <a:pt x="1718940" y="2647529"/>
-                  </a:lnTo>
-                  <a:lnTo>
-                    <a:pt x="1647318" y="2659751"/>
-                  </a:lnTo>
-                  <a:lnTo>
-                    <a:pt x="1575695" y="2671678"/>
-                  </a:lnTo>
-                  <a:lnTo>
-                    <a:pt x="1504073" y="2683319"/>
-                  </a:lnTo>
-                  <a:lnTo>
-                    <a:pt x="1432450" y="2694679"/>
-                  </a:lnTo>
-                  <a:lnTo>
-                    <a:pt x="1360827" y="2705766"/>
-                  </a:lnTo>
-                  <a:lnTo>
-                    <a:pt x="1289205" y="2716586"/>
-                  </a:lnTo>
-                  <a:lnTo>
-                    <a:pt x="1217582" y="2727146"/>
-                  </a:lnTo>
-                  <a:lnTo>
-                    <a:pt x="1145960" y="2737452"/>
-                  </a:lnTo>
-                  <a:lnTo>
-                    <a:pt x="1074337" y="2747510"/>
-                  </a:lnTo>
-                  <a:lnTo>
-                    <a:pt x="1002715" y="2757326"/>
-                  </a:lnTo>
-                  <a:lnTo>
-                    <a:pt x="931092" y="2766906"/>
-                  </a:lnTo>
-                  <a:lnTo>
-                    <a:pt x="859470" y="2776256"/>
-                  </a:lnTo>
-                  <a:lnTo>
-                    <a:pt x="787847" y="2785380"/>
-                  </a:lnTo>
-                  <a:lnTo>
-                    <a:pt x="716225" y="2794285"/>
-                  </a:lnTo>
-                  <a:lnTo>
-                    <a:pt x="644602" y="2802976"/>
-                  </a:lnTo>
-                  <a:lnTo>
-                    <a:pt x="572980" y="2811457"/>
-                  </a:lnTo>
-                  <a:lnTo>
-                    <a:pt x="501357" y="2819735"/>
-                  </a:lnTo>
-                  <a:lnTo>
-                    <a:pt x="429735" y="2827813"/>
-                  </a:lnTo>
-                  <a:lnTo>
-                    <a:pt x="358112" y="2835698"/>
-                  </a:lnTo>
-                  <a:lnTo>
-                    <a:pt x="286490" y="2843392"/>
-                  </a:lnTo>
-                  <a:lnTo>
-                    <a:pt x="214867" y="2850901"/>
-                  </a:lnTo>
-                  <a:lnTo>
-                    <a:pt x="143245" y="2858230"/>
-                  </a:lnTo>
-                  <a:lnTo>
-                    <a:pt x="71622" y="2865382"/>
-                  </a:lnTo>
-                  <a:lnTo>
-                    <a:pt x="0" y="2872362"/>
+                    <a:pt x="7090630" y="2662333"/>
+                  </a:lnTo>
+                  <a:lnTo>
+                    <a:pt x="7019007" y="2656953"/>
+                  </a:lnTo>
+                  <a:lnTo>
+                    <a:pt x="6947385" y="2651513"/>
+                  </a:lnTo>
+                  <a:lnTo>
+                    <a:pt x="6875762" y="2646013"/>
+                  </a:lnTo>
+                  <a:lnTo>
+                    <a:pt x="6804139" y="2640451"/>
+                  </a:lnTo>
+                  <a:lnTo>
+                    <a:pt x="6732517" y="2634828"/>
+                  </a:lnTo>
+                  <a:lnTo>
+                    <a:pt x="6660894" y="2629142"/>
+                  </a:lnTo>
+                  <a:lnTo>
+                    <a:pt x="6589272" y="2623393"/>
+                  </a:lnTo>
+                  <a:lnTo>
+                    <a:pt x="6517649" y="2617579"/>
+                  </a:lnTo>
+                  <a:lnTo>
+                    <a:pt x="6446027" y="2611701"/>
+                  </a:lnTo>
+                  <a:lnTo>
+                    <a:pt x="6374404" y="2605758"/>
+                  </a:lnTo>
+                  <a:lnTo>
+                    <a:pt x="6302782" y="2599749"/>
+                  </a:lnTo>
+                  <a:lnTo>
+                    <a:pt x="6231159" y="2593672"/>
+                  </a:lnTo>
+                  <a:lnTo>
+                    <a:pt x="6159537" y="2587529"/>
+                  </a:lnTo>
+                  <a:lnTo>
+                    <a:pt x="6087914" y="2581316"/>
+                  </a:lnTo>
+                  <a:lnTo>
+                    <a:pt x="6016292" y="2575035"/>
+                  </a:lnTo>
+                  <a:lnTo>
+                    <a:pt x="5944669" y="2568684"/>
+                  </a:lnTo>
+                  <a:lnTo>
+                    <a:pt x="5873047" y="2562262"/>
+                  </a:lnTo>
+                  <a:lnTo>
+                    <a:pt x="5801424" y="2555769"/>
+                  </a:lnTo>
+                  <a:lnTo>
+                    <a:pt x="5729802" y="2549204"/>
+                  </a:lnTo>
+                  <a:lnTo>
+                    <a:pt x="5658179" y="2542565"/>
+                  </a:lnTo>
+                  <a:lnTo>
+                    <a:pt x="5586557" y="2535853"/>
+                  </a:lnTo>
+                  <a:lnTo>
+                    <a:pt x="5514934" y="2529066"/>
+                  </a:lnTo>
+                  <a:lnTo>
+                    <a:pt x="5443311" y="2522203"/>
+                  </a:lnTo>
+                  <a:lnTo>
+                    <a:pt x="5371689" y="2515264"/>
+                  </a:lnTo>
+                  <a:lnTo>
+                    <a:pt x="5300066" y="2508248"/>
+                  </a:lnTo>
+                  <a:lnTo>
+                    <a:pt x="5228444" y="2501154"/>
+                  </a:lnTo>
+                  <a:lnTo>
+                    <a:pt x="5156821" y="2493981"/>
+                  </a:lnTo>
+                  <a:lnTo>
+                    <a:pt x="5085199" y="2486728"/>
+                  </a:lnTo>
+                  <a:lnTo>
+                    <a:pt x="5013576" y="2479395"/>
+                  </a:lnTo>
+                  <a:lnTo>
+                    <a:pt x="4941954" y="2471980"/>
+                  </a:lnTo>
+                  <a:lnTo>
+                    <a:pt x="4870331" y="2464482"/>
+                  </a:lnTo>
+                  <a:lnTo>
+                    <a:pt x="4798709" y="2456902"/>
+                  </a:lnTo>
+                  <a:lnTo>
+                    <a:pt x="4727086" y="2449236"/>
+                  </a:lnTo>
+                  <a:lnTo>
+                    <a:pt x="4655464" y="2441486"/>
+                  </a:lnTo>
+                  <a:lnTo>
+                    <a:pt x="4583841" y="2433649"/>
+                  </a:lnTo>
+                  <a:lnTo>
+                    <a:pt x="4512219" y="2425725"/>
+                  </a:lnTo>
+                  <a:lnTo>
+                    <a:pt x="4440596" y="2417713"/>
+                  </a:lnTo>
+                  <a:lnTo>
+                    <a:pt x="4368974" y="2409612"/>
+                  </a:lnTo>
+                  <a:lnTo>
+                    <a:pt x="4297351" y="2401421"/>
+                  </a:lnTo>
+                  <a:lnTo>
+                    <a:pt x="4225729" y="2393138"/>
+                  </a:lnTo>
+                  <a:lnTo>
+                    <a:pt x="4154106" y="2384764"/>
+                  </a:lnTo>
+                  <a:lnTo>
+                    <a:pt x="4082483" y="2376296"/>
+                  </a:lnTo>
+                  <a:lnTo>
+                    <a:pt x="4010861" y="2367734"/>
+                  </a:lnTo>
+                  <a:lnTo>
+                    <a:pt x="3939238" y="2359077"/>
+                  </a:lnTo>
+                  <a:lnTo>
+                    <a:pt x="3867616" y="2350324"/>
+                  </a:lnTo>
+                  <a:lnTo>
+                    <a:pt x="3795993" y="2341473"/>
+                  </a:lnTo>
+                  <a:lnTo>
+                    <a:pt x="3724371" y="2332524"/>
+                  </a:lnTo>
+                  <a:lnTo>
+                    <a:pt x="3652748" y="2323475"/>
+                  </a:lnTo>
+                  <a:lnTo>
+                    <a:pt x="3581126" y="2314325"/>
+                  </a:lnTo>
+                  <a:lnTo>
+                    <a:pt x="3509503" y="2305074"/>
+                  </a:lnTo>
+                  <a:lnTo>
+                    <a:pt x="3437881" y="2295720"/>
+                  </a:lnTo>
+                  <a:lnTo>
+                    <a:pt x="3366258" y="2286262"/>
+                  </a:lnTo>
+                  <a:lnTo>
+                    <a:pt x="3294636" y="2276698"/>
+                  </a:lnTo>
+                  <a:lnTo>
+                    <a:pt x="3223013" y="2296320"/>
+                  </a:lnTo>
+                  <a:lnTo>
+                    <a:pt x="3151391" y="2316670"/>
+                  </a:lnTo>
+                  <a:lnTo>
+                    <a:pt x="3079768" y="2336532"/>
+                  </a:lnTo>
+                  <a:lnTo>
+                    <a:pt x="3008146" y="2355919"/>
+                  </a:lnTo>
+                  <a:lnTo>
+                    <a:pt x="2936523" y="2374841"/>
+                  </a:lnTo>
+                  <a:lnTo>
+                    <a:pt x="2864901" y="2393310"/>
+                  </a:lnTo>
+                  <a:lnTo>
+                    <a:pt x="2793278" y="2411337"/>
+                  </a:lnTo>
+                  <a:lnTo>
+                    <a:pt x="2721655" y="2428932"/>
+                  </a:lnTo>
+                  <a:lnTo>
+                    <a:pt x="2650033" y="2446105"/>
+                  </a:lnTo>
+                  <a:lnTo>
+                    <a:pt x="2578410" y="2462867"/>
+                  </a:lnTo>
+                  <a:lnTo>
+                    <a:pt x="2506788" y="2479228"/>
+                  </a:lnTo>
+                  <a:lnTo>
+                    <a:pt x="2435165" y="2495197"/>
+                  </a:lnTo>
+                  <a:lnTo>
+                    <a:pt x="2363543" y="2510783"/>
+                  </a:lnTo>
+                  <a:lnTo>
+                    <a:pt x="2291920" y="2525997"/>
+                  </a:lnTo>
+                  <a:lnTo>
+                    <a:pt x="2220298" y="2540845"/>
+                  </a:lnTo>
+                  <a:lnTo>
+                    <a:pt x="2148675" y="2555339"/>
+                  </a:lnTo>
+                  <a:lnTo>
+                    <a:pt x="2077053" y="2569485"/>
+                  </a:lnTo>
+                  <a:lnTo>
+                    <a:pt x="2005430" y="2583292"/>
+                  </a:lnTo>
+                  <a:lnTo>
+                    <a:pt x="1933808" y="2596769"/>
+                  </a:lnTo>
+                  <a:lnTo>
+                    <a:pt x="1862185" y="2609923"/>
+                  </a:lnTo>
+                  <a:lnTo>
+                    <a:pt x="1790563" y="2622761"/>
+                  </a:lnTo>
+                  <a:lnTo>
+                    <a:pt x="1718940" y="2635293"/>
+                  </a:lnTo>
+                  <a:lnTo>
+                    <a:pt x="1647318" y="2647524"/>
+                  </a:lnTo>
+                  <a:lnTo>
+                    <a:pt x="1575695" y="2659462"/>
+                  </a:lnTo>
+                  <a:lnTo>
+                    <a:pt x="1504073" y="2671114"/>
+                  </a:lnTo>
+                  <a:lnTo>
+                    <a:pt x="1432450" y="2682488"/>
+                  </a:lnTo>
+                  <a:lnTo>
+                    <a:pt x="1360827" y="2693589"/>
+                  </a:lnTo>
+                  <a:lnTo>
+                    <a:pt x="1289205" y="2704424"/>
+                  </a:lnTo>
+                  <a:lnTo>
+                    <a:pt x="1217582" y="2714999"/>
+                  </a:lnTo>
+                  <a:lnTo>
+                    <a:pt x="1145960" y="2725321"/>
+                  </a:lnTo>
+                  <a:lnTo>
+                    <a:pt x="1074337" y="2735396"/>
+                  </a:lnTo>
+                  <a:lnTo>
+                    <a:pt x="1002715" y="2745230"/>
+                  </a:lnTo>
+                  <a:lnTo>
+                    <a:pt x="931092" y="2754828"/>
+                  </a:lnTo>
+                  <a:lnTo>
+                    <a:pt x="859470" y="2764197"/>
+                  </a:lnTo>
+                  <a:lnTo>
+                    <a:pt x="787847" y="2773341"/>
+                  </a:lnTo>
+                  <a:lnTo>
+                    <a:pt x="716225" y="2782266"/>
+                  </a:lnTo>
+                  <a:lnTo>
+                    <a:pt x="644602" y="2790977"/>
+                  </a:lnTo>
+                  <a:lnTo>
+                    <a:pt x="572980" y="2799479"/>
+                  </a:lnTo>
+                  <a:lnTo>
+                    <a:pt x="501357" y="2807778"/>
+                  </a:lnTo>
+                  <a:lnTo>
+                    <a:pt x="429735" y="2815878"/>
+                  </a:lnTo>
+                  <a:lnTo>
+                    <a:pt x="358112" y="2823785"/>
+                  </a:lnTo>
+                  <a:lnTo>
+                    <a:pt x="286490" y="2831501"/>
+                  </a:lnTo>
+                  <a:lnTo>
+                    <a:pt x="214867" y="2839033"/>
+                  </a:lnTo>
+                  <a:lnTo>
+                    <a:pt x="143245" y="2846385"/>
+                  </a:lnTo>
+                  <a:lnTo>
+                    <a:pt x="71622" y="2853561"/>
+                  </a:lnTo>
+                  <a:lnTo>
+                    <a:pt x="0" y="2860564"/>
                   </a:lnTo>
                   <a:close/>
                 </a:path>
@@ -3590,309 +3590,309 @@
           </p:nvSpPr>
           <p:spPr>
             <a:xfrm>
-              <a:off x="1172049" y="2393690"/>
-              <a:ext cx="7090630" cy="2285095"/>
+              <a:off x="1172049" y="2403215"/>
+              <a:ext cx="7090630" cy="2275472"/>
             </a:xfrm>
             <a:custGeom>
               <a:avLst/>
               <a:pathLst>
-                <a:path w="7090630" h="2285095">
+                <a:path w="7090630" h="2275472">
                   <a:moveTo>
-                    <a:pt x="0" y="1716551"/>
+                    <a:pt x="0" y="1700006"/>
                   </a:moveTo>
                   <a:lnTo>
-                    <a:pt x="71622" y="1732191"/>
-                  </a:lnTo>
-                  <a:lnTo>
-                    <a:pt x="143245" y="1747661"/>
-                  </a:lnTo>
-                  <a:lnTo>
-                    <a:pt x="214867" y="1762963"/>
-                  </a:lnTo>
-                  <a:lnTo>
-                    <a:pt x="286490" y="1778098"/>
-                  </a:lnTo>
-                  <a:lnTo>
-                    <a:pt x="358112" y="1793069"/>
-                  </a:lnTo>
-                  <a:lnTo>
-                    <a:pt x="429735" y="1807877"/>
-                  </a:lnTo>
-                  <a:lnTo>
-                    <a:pt x="501357" y="1822524"/>
-                  </a:lnTo>
-                  <a:lnTo>
-                    <a:pt x="572980" y="1837012"/>
-                  </a:lnTo>
-                  <a:lnTo>
-                    <a:pt x="644602" y="1851343"/>
-                  </a:lnTo>
-                  <a:lnTo>
-                    <a:pt x="716225" y="1865518"/>
-                  </a:lnTo>
-                  <a:lnTo>
-                    <a:pt x="787847" y="1879538"/>
-                  </a:lnTo>
-                  <a:lnTo>
-                    <a:pt x="859470" y="1893407"/>
-                  </a:lnTo>
-                  <a:lnTo>
-                    <a:pt x="931092" y="1907124"/>
-                  </a:lnTo>
-                  <a:lnTo>
-                    <a:pt x="1002715" y="1920693"/>
-                  </a:lnTo>
-                  <a:lnTo>
-                    <a:pt x="1074337" y="1934114"/>
-                  </a:lnTo>
-                  <a:lnTo>
-                    <a:pt x="1145960" y="1947389"/>
-                  </a:lnTo>
-                  <a:lnTo>
-                    <a:pt x="1217582" y="1960520"/>
-                  </a:lnTo>
-                  <a:lnTo>
-                    <a:pt x="1289205" y="1973508"/>
-                  </a:lnTo>
-                  <a:lnTo>
-                    <a:pt x="1360827" y="1986355"/>
-                  </a:lnTo>
-                  <a:lnTo>
-                    <a:pt x="1432450" y="1999063"/>
-                  </a:lnTo>
-                  <a:lnTo>
-                    <a:pt x="1504073" y="2011632"/>
-                  </a:lnTo>
-                  <a:lnTo>
-                    <a:pt x="1575695" y="2024065"/>
-                  </a:lnTo>
-                  <a:lnTo>
-                    <a:pt x="1647318" y="2036362"/>
-                  </a:lnTo>
-                  <a:lnTo>
-                    <a:pt x="1718940" y="2048526"/>
-                  </a:lnTo>
-                  <a:lnTo>
-                    <a:pt x="1790563" y="2060558"/>
-                  </a:lnTo>
-                  <a:lnTo>
-                    <a:pt x="1862185" y="2072459"/>
-                  </a:lnTo>
-                  <a:lnTo>
-                    <a:pt x="1933808" y="2084230"/>
-                  </a:lnTo>
-                  <a:lnTo>
-                    <a:pt x="2005430" y="2095874"/>
-                  </a:lnTo>
-                  <a:lnTo>
-                    <a:pt x="2077053" y="2107391"/>
-                  </a:lnTo>
-                  <a:lnTo>
-                    <a:pt x="2148675" y="2118783"/>
-                  </a:lnTo>
-                  <a:lnTo>
-                    <a:pt x="2220298" y="2130051"/>
-                  </a:lnTo>
-                  <a:lnTo>
-                    <a:pt x="2291920" y="2141196"/>
-                  </a:lnTo>
-                  <a:lnTo>
-                    <a:pt x="2363543" y="2152221"/>
-                  </a:lnTo>
-                  <a:lnTo>
-                    <a:pt x="2435165" y="2163125"/>
-                  </a:lnTo>
-                  <a:lnTo>
-                    <a:pt x="2506788" y="2173912"/>
-                  </a:lnTo>
-                  <a:lnTo>
-                    <a:pt x="2578410" y="2184580"/>
-                  </a:lnTo>
-                  <a:lnTo>
-                    <a:pt x="2650033" y="2195133"/>
-                  </a:lnTo>
-                  <a:lnTo>
-                    <a:pt x="2721655" y="2205572"/>
-                  </a:lnTo>
-                  <a:lnTo>
-                    <a:pt x="2793278" y="2215896"/>
-                  </a:lnTo>
-                  <a:lnTo>
-                    <a:pt x="2864901" y="2226109"/>
-                  </a:lnTo>
-                  <a:lnTo>
-                    <a:pt x="2936523" y="2236210"/>
-                  </a:lnTo>
-                  <a:lnTo>
-                    <a:pt x="3008146" y="2246202"/>
-                  </a:lnTo>
-                  <a:lnTo>
-                    <a:pt x="3079768" y="2256085"/>
-                  </a:lnTo>
-                  <a:lnTo>
-                    <a:pt x="3151391" y="2265861"/>
-                  </a:lnTo>
-                  <a:lnTo>
-                    <a:pt x="3223013" y="2275531"/>
-                  </a:lnTo>
-                  <a:lnTo>
-                    <a:pt x="3294636" y="2285095"/>
-                  </a:lnTo>
-                  <a:lnTo>
-                    <a:pt x="3366258" y="2266098"/>
-                  </a:lnTo>
-                  <a:lnTo>
-                    <a:pt x="3437881" y="2244172"/>
-                  </a:lnTo>
-                  <a:lnTo>
-                    <a:pt x="3509503" y="2221706"/>
-                  </a:lnTo>
-                  <a:lnTo>
-                    <a:pt x="3581126" y="2198686"/>
-                  </a:lnTo>
-                  <a:lnTo>
-                    <a:pt x="3652748" y="2175099"/>
-                  </a:lnTo>
-                  <a:lnTo>
-                    <a:pt x="3724371" y="2150930"/>
-                  </a:lnTo>
-                  <a:lnTo>
-                    <a:pt x="3795993" y="2126165"/>
-                  </a:lnTo>
-                  <a:lnTo>
-                    <a:pt x="3867616" y="2100790"/>
-                  </a:lnTo>
-                  <a:lnTo>
-                    <a:pt x="3939238" y="2074789"/>
-                  </a:lnTo>
-                  <a:lnTo>
-                    <a:pt x="4010861" y="2048148"/>
-                  </a:lnTo>
-                  <a:lnTo>
-                    <a:pt x="4082483" y="2020849"/>
-                  </a:lnTo>
-                  <a:lnTo>
-                    <a:pt x="4154106" y="1992878"/>
-                  </a:lnTo>
-                  <a:lnTo>
-                    <a:pt x="4225729" y="1964217"/>
-                  </a:lnTo>
-                  <a:lnTo>
-                    <a:pt x="4297351" y="1934849"/>
-                  </a:lnTo>
-                  <a:lnTo>
-                    <a:pt x="4368974" y="1904758"/>
-                  </a:lnTo>
-                  <a:lnTo>
-                    <a:pt x="4440596" y="1873925"/>
-                  </a:lnTo>
-                  <a:lnTo>
-                    <a:pt x="4512219" y="1842331"/>
-                  </a:lnTo>
-                  <a:lnTo>
-                    <a:pt x="4583841" y="1809959"/>
-                  </a:lnTo>
-                  <a:lnTo>
-                    <a:pt x="4655464" y="1776789"/>
-                  </a:lnTo>
-                  <a:lnTo>
-                    <a:pt x="4727086" y="1742801"/>
-                  </a:lnTo>
-                  <a:lnTo>
-                    <a:pt x="4798709" y="1707975"/>
-                  </a:lnTo>
-                  <a:lnTo>
-                    <a:pt x="4870331" y="1672291"/>
-                  </a:lnTo>
-                  <a:lnTo>
-                    <a:pt x="4941954" y="1635727"/>
-                  </a:lnTo>
-                  <a:lnTo>
-                    <a:pt x="5013576" y="1598262"/>
-                  </a:lnTo>
-                  <a:lnTo>
-                    <a:pt x="5085199" y="1559873"/>
-                  </a:lnTo>
-                  <a:lnTo>
-                    <a:pt x="5156821" y="1520538"/>
-                  </a:lnTo>
-                  <a:lnTo>
-                    <a:pt x="5228444" y="1480233"/>
-                  </a:lnTo>
-                  <a:lnTo>
-                    <a:pt x="5300066" y="1438934"/>
-                  </a:lnTo>
-                  <a:lnTo>
-                    <a:pt x="5371689" y="1396618"/>
-                  </a:lnTo>
-                  <a:lnTo>
-                    <a:pt x="5443311" y="1353258"/>
-                  </a:lnTo>
-                  <a:lnTo>
-                    <a:pt x="5514934" y="1308829"/>
-                  </a:lnTo>
-                  <a:lnTo>
-                    <a:pt x="5586557" y="1263306"/>
-                  </a:lnTo>
-                  <a:lnTo>
-                    <a:pt x="5658179" y="1216659"/>
-                  </a:lnTo>
-                  <a:lnTo>
-                    <a:pt x="5729802" y="1168863"/>
-                  </a:lnTo>
-                  <a:lnTo>
-                    <a:pt x="5801424" y="1119889"/>
-                  </a:lnTo>
-                  <a:lnTo>
-                    <a:pt x="5873047" y="1069708"/>
-                  </a:lnTo>
-                  <a:lnTo>
-                    <a:pt x="5944669" y="1018289"/>
-                  </a:lnTo>
-                  <a:lnTo>
-                    <a:pt x="6016292" y="965603"/>
-                  </a:lnTo>
-                  <a:lnTo>
-                    <a:pt x="6087914" y="911618"/>
-                  </a:lnTo>
-                  <a:lnTo>
-                    <a:pt x="6159537" y="856302"/>
-                  </a:lnTo>
-                  <a:lnTo>
-                    <a:pt x="6231159" y="799623"/>
-                  </a:lnTo>
-                  <a:lnTo>
-                    <a:pt x="6302782" y="741546"/>
-                  </a:lnTo>
-                  <a:lnTo>
-                    <a:pt x="6374404" y="682038"/>
-                  </a:lnTo>
-                  <a:lnTo>
-                    <a:pt x="6446027" y="621063"/>
-                  </a:lnTo>
-                  <a:lnTo>
-                    <a:pt x="6517649" y="558584"/>
-                  </a:lnTo>
-                  <a:lnTo>
-                    <a:pt x="6589272" y="494566"/>
-                  </a:lnTo>
-                  <a:lnTo>
-                    <a:pt x="6660894" y="428969"/>
-                  </a:lnTo>
-                  <a:lnTo>
-                    <a:pt x="6732517" y="361755"/>
-                  </a:lnTo>
-                  <a:lnTo>
-                    <a:pt x="6804139" y="292884"/>
-                  </a:lnTo>
-                  <a:lnTo>
-                    <a:pt x="6875762" y="222316"/>
-                  </a:lnTo>
-                  <a:lnTo>
-                    <a:pt x="6947385" y="150007"/>
-                  </a:lnTo>
-                  <a:lnTo>
-                    <a:pt x="7019007" y="75917"/>
+                    <a:pt x="71622" y="1715914"/>
+                  </a:lnTo>
+                  <a:lnTo>
+                    <a:pt x="143245" y="1731647"/>
+                  </a:lnTo>
+                  <a:lnTo>
+                    <a:pt x="214867" y="1747206"/>
+                  </a:lnTo>
+                  <a:lnTo>
+                    <a:pt x="286490" y="1762595"/>
+                  </a:lnTo>
+                  <a:lnTo>
+                    <a:pt x="358112" y="1777814"/>
+                  </a:lnTo>
+                  <a:lnTo>
+                    <a:pt x="429735" y="1792866"/>
+                  </a:lnTo>
+                  <a:lnTo>
+                    <a:pt x="501357" y="1807752"/>
+                  </a:lnTo>
+                  <a:lnTo>
+                    <a:pt x="572980" y="1822475"/>
+                  </a:lnTo>
+                  <a:lnTo>
+                    <a:pt x="644602" y="1837035"/>
+                  </a:lnTo>
+                  <a:lnTo>
+                    <a:pt x="716225" y="1851435"/>
+                  </a:lnTo>
+                  <a:lnTo>
+                    <a:pt x="787847" y="1865677"/>
+                  </a:lnTo>
+                  <a:lnTo>
+                    <a:pt x="859470" y="1879762"/>
+                  </a:lnTo>
+                  <a:lnTo>
+                    <a:pt x="931092" y="1893693"/>
+                  </a:lnTo>
+                  <a:lnTo>
+                    <a:pt x="1002715" y="1907470"/>
+                  </a:lnTo>
+                  <a:lnTo>
+                    <a:pt x="1074337" y="1921095"/>
+                  </a:lnTo>
+                  <a:lnTo>
+                    <a:pt x="1145960" y="1934570"/>
+                  </a:lnTo>
+                  <a:lnTo>
+                    <a:pt x="1217582" y="1947898"/>
+                  </a:lnTo>
+                  <a:lnTo>
+                    <a:pt x="1289205" y="1961078"/>
+                  </a:lnTo>
+                  <a:lnTo>
+                    <a:pt x="1360827" y="1974114"/>
+                  </a:lnTo>
+                  <a:lnTo>
+                    <a:pt x="1432450" y="1987006"/>
+                  </a:lnTo>
+                  <a:lnTo>
+                    <a:pt x="1504073" y="1999757"/>
+                  </a:lnTo>
+                  <a:lnTo>
+                    <a:pt x="1575695" y="2012367"/>
+                  </a:lnTo>
+                  <a:lnTo>
+                    <a:pt x="1647318" y="2024838"/>
+                  </a:lnTo>
+                  <a:lnTo>
+                    <a:pt x="1718940" y="2037172"/>
+                  </a:lnTo>
+                  <a:lnTo>
+                    <a:pt x="1790563" y="2049371"/>
+                  </a:lnTo>
+                  <a:lnTo>
+                    <a:pt x="1862185" y="2061435"/>
+                  </a:lnTo>
+                  <a:lnTo>
+                    <a:pt x="1933808" y="2073367"/>
+                  </a:lnTo>
+                  <a:lnTo>
+                    <a:pt x="2005430" y="2085167"/>
+                  </a:lnTo>
+                  <a:lnTo>
+                    <a:pt x="2077053" y="2096837"/>
+                  </a:lnTo>
+                  <a:lnTo>
+                    <a:pt x="2148675" y="2108380"/>
+                  </a:lnTo>
+                  <a:lnTo>
+                    <a:pt x="2220298" y="2119795"/>
+                  </a:lnTo>
+                  <a:lnTo>
+                    <a:pt x="2291920" y="2131084"/>
+                  </a:lnTo>
+                  <a:lnTo>
+                    <a:pt x="2363543" y="2142250"/>
+                  </a:lnTo>
+                  <a:lnTo>
+                    <a:pt x="2435165" y="2153292"/>
+                  </a:lnTo>
+                  <a:lnTo>
+                    <a:pt x="2506788" y="2164213"/>
+                  </a:lnTo>
+                  <a:lnTo>
+                    <a:pt x="2578410" y="2175014"/>
+                  </a:lnTo>
+                  <a:lnTo>
+                    <a:pt x="2650033" y="2185696"/>
+                  </a:lnTo>
+                  <a:lnTo>
+                    <a:pt x="2721655" y="2196261"/>
+                  </a:lnTo>
+                  <a:lnTo>
+                    <a:pt x="2793278" y="2206709"/>
+                  </a:lnTo>
+                  <a:lnTo>
+                    <a:pt x="2864901" y="2217042"/>
+                  </a:lnTo>
+                  <a:lnTo>
+                    <a:pt x="2936523" y="2227262"/>
+                  </a:lnTo>
+                  <a:lnTo>
+                    <a:pt x="3008146" y="2237369"/>
+                  </a:lnTo>
+                  <a:lnTo>
+                    <a:pt x="3079768" y="2247365"/>
+                  </a:lnTo>
+                  <a:lnTo>
+                    <a:pt x="3151391" y="2257251"/>
+                  </a:lnTo>
+                  <a:lnTo>
+                    <a:pt x="3223013" y="2267029"/>
+                  </a:lnTo>
+                  <a:lnTo>
+                    <a:pt x="3294636" y="2275472"/>
+                  </a:lnTo>
+                  <a:lnTo>
+                    <a:pt x="3366258" y="2254111"/>
+                  </a:lnTo>
+                  <a:lnTo>
+                    <a:pt x="3437881" y="2232227"/>
+                  </a:lnTo>
+                  <a:lnTo>
+                    <a:pt x="3509503" y="2209805"/>
+                  </a:lnTo>
+                  <a:lnTo>
+                    <a:pt x="3581126" y="2186833"/>
+                  </a:lnTo>
+                  <a:lnTo>
+                    <a:pt x="3652748" y="2163298"/>
+                  </a:lnTo>
+                  <a:lnTo>
+                    <a:pt x="3724371" y="2139185"/>
+                  </a:lnTo>
+                  <a:lnTo>
+                    <a:pt x="3795993" y="2114480"/>
+                  </a:lnTo>
+                  <a:lnTo>
+                    <a:pt x="3867616" y="2089169"/>
+                  </a:lnTo>
+                  <a:lnTo>
+                    <a:pt x="3939238" y="2063237"/>
+                  </a:lnTo>
+                  <a:lnTo>
+                    <a:pt x="4010861" y="2036669"/>
+                  </a:lnTo>
+                  <a:lnTo>
+                    <a:pt x="4082483" y="2009449"/>
+                  </a:lnTo>
+                  <a:lnTo>
+                    <a:pt x="4154106" y="1981561"/>
+                  </a:lnTo>
+                  <a:lnTo>
+                    <a:pt x="4225729" y="1952989"/>
+                  </a:lnTo>
+                  <a:lnTo>
+                    <a:pt x="4297351" y="1923715"/>
+                  </a:lnTo>
+                  <a:lnTo>
+                    <a:pt x="4368974" y="1893724"/>
+                  </a:lnTo>
+                  <a:lnTo>
+                    <a:pt x="4440596" y="1862996"/>
+                  </a:lnTo>
+                  <a:lnTo>
+                    <a:pt x="4512219" y="1831514"/>
+                  </a:lnTo>
+                  <a:lnTo>
+                    <a:pt x="4583841" y="1799260"/>
+                  </a:lnTo>
+                  <a:lnTo>
+                    <a:pt x="4655464" y="1766215"/>
+                  </a:lnTo>
+                  <a:lnTo>
+                    <a:pt x="4727086" y="1732358"/>
+                  </a:lnTo>
+                  <a:lnTo>
+                    <a:pt x="4798709" y="1697671"/>
+                  </a:lnTo>
+                  <a:lnTo>
+                    <a:pt x="4870331" y="1662133"/>
+                  </a:lnTo>
+                  <a:lnTo>
+                    <a:pt x="4941954" y="1625722"/>
+                  </a:lnTo>
+                  <a:lnTo>
+                    <a:pt x="5013576" y="1588419"/>
+                  </a:lnTo>
+                  <a:lnTo>
+                    <a:pt x="5085199" y="1550199"/>
+                  </a:lnTo>
+                  <a:lnTo>
+                    <a:pt x="5156821" y="1511043"/>
+                  </a:lnTo>
+                  <a:lnTo>
+                    <a:pt x="5228444" y="1470925"/>
+                  </a:lnTo>
+                  <a:lnTo>
+                    <a:pt x="5300066" y="1429823"/>
+                  </a:lnTo>
+                  <a:lnTo>
+                    <a:pt x="5371689" y="1387712"/>
+                  </a:lnTo>
+                  <a:lnTo>
+                    <a:pt x="5443311" y="1344568"/>
+                  </a:lnTo>
+                  <a:lnTo>
+                    <a:pt x="5514934" y="1300365"/>
+                  </a:lnTo>
+                  <a:lnTo>
+                    <a:pt x="5586557" y="1255078"/>
+                  </a:lnTo>
+                  <a:lnTo>
+                    <a:pt x="5658179" y="1208680"/>
+                  </a:lnTo>
+                  <a:lnTo>
+                    <a:pt x="5729802" y="1161143"/>
+                  </a:lnTo>
+                  <a:lnTo>
+                    <a:pt x="5801424" y="1112439"/>
+                  </a:lnTo>
+                  <a:lnTo>
+                    <a:pt x="5873047" y="1062541"/>
+                  </a:lnTo>
+                  <a:lnTo>
+                    <a:pt x="5944669" y="1011418"/>
+                  </a:lnTo>
+                  <a:lnTo>
+                    <a:pt x="6016292" y="959041"/>
+                  </a:lnTo>
+                  <a:lnTo>
+                    <a:pt x="6087914" y="905378"/>
+                  </a:lnTo>
+                  <a:lnTo>
+                    <a:pt x="6159537" y="850399"/>
+                  </a:lnTo>
+                  <a:lnTo>
+                    <a:pt x="6231159" y="794070"/>
+                  </a:lnTo>
+                  <a:lnTo>
+                    <a:pt x="6302782" y="736360"/>
+                  </a:lnTo>
+                  <a:lnTo>
+                    <a:pt x="6374404" y="677233"/>
+                  </a:lnTo>
+                  <a:lnTo>
+                    <a:pt x="6446027" y="616656"/>
+                  </a:lnTo>
+                  <a:lnTo>
+                    <a:pt x="6517649" y="554592"/>
+                  </a:lnTo>
+                  <a:lnTo>
+                    <a:pt x="6589272" y="491005"/>
+                  </a:lnTo>
+                  <a:lnTo>
+                    <a:pt x="6660894" y="425858"/>
+                  </a:lnTo>
+                  <a:lnTo>
+                    <a:pt x="6732517" y="359113"/>
+                  </a:lnTo>
+                  <a:lnTo>
+                    <a:pt x="6804139" y="290729"/>
+                  </a:lnTo>
+                  <a:lnTo>
+                    <a:pt x="6875762" y="220668"/>
+                  </a:lnTo>
+                  <a:lnTo>
+                    <a:pt x="6947385" y="148888"/>
+                  </a:lnTo>
+                  <a:lnTo>
+                    <a:pt x="7019007" y="75346"/>
                   </a:lnTo>
                   <a:lnTo>
                     <a:pt x="7090630" y="0"/>
@@ -3915,312 +3915,312 @@
           </p:nvSpPr>
           <p:spPr>
             <a:xfrm>
-              <a:off x="1172049" y="4681186"/>
-              <a:ext cx="7090630" cy="584866"/>
+              <a:off x="1172049" y="4679914"/>
+              <a:ext cx="7090630" cy="583865"/>
             </a:xfrm>
             <a:custGeom>
               <a:avLst/>
               <a:pathLst>
-                <a:path w="7090630" h="584866">
+                <a:path w="7090630" h="583865">
                   <a:moveTo>
-                    <a:pt x="7090630" y="380282"/>
+                    <a:pt x="7090630" y="385634"/>
                   </a:moveTo>
                   <a:lnTo>
-                    <a:pt x="7019007" y="374923"/>
-                  </a:lnTo>
-                  <a:lnTo>
-                    <a:pt x="6947385" y="369505"/>
-                  </a:lnTo>
-                  <a:lnTo>
-                    <a:pt x="6875762" y="364027"/>
-                  </a:lnTo>
-                  <a:lnTo>
-                    <a:pt x="6804139" y="358489"/>
-                  </a:lnTo>
-                  <a:lnTo>
-                    <a:pt x="6732517" y="352890"/>
-                  </a:lnTo>
-                  <a:lnTo>
-                    <a:pt x="6660894" y="347230"/>
-                  </a:lnTo>
-                  <a:lnTo>
-                    <a:pt x="6589272" y="341507"/>
-                  </a:lnTo>
-                  <a:lnTo>
-                    <a:pt x="6517649" y="335722"/>
-                  </a:lnTo>
-                  <a:lnTo>
-                    <a:pt x="6446027" y="329873"/>
-                  </a:lnTo>
-                  <a:lnTo>
-                    <a:pt x="6374404" y="323959"/>
-                  </a:lnTo>
-                  <a:lnTo>
-                    <a:pt x="6302782" y="317981"/>
-                  </a:lnTo>
-                  <a:lnTo>
-                    <a:pt x="6231159" y="311937"/>
-                  </a:lnTo>
-                  <a:lnTo>
-                    <a:pt x="6159537" y="305827"/>
-                  </a:lnTo>
-                  <a:lnTo>
-                    <a:pt x="6087914" y="299649"/>
-                  </a:lnTo>
-                  <a:lnTo>
-                    <a:pt x="6016292" y="293404"/>
-                  </a:lnTo>
-                  <a:lnTo>
-                    <a:pt x="5944669" y="287090"/>
-                  </a:lnTo>
-                  <a:lnTo>
-                    <a:pt x="5873047" y="280707"/>
-                  </a:lnTo>
-                  <a:lnTo>
-                    <a:pt x="5801424" y="274253"/>
-                  </a:lnTo>
-                  <a:lnTo>
-                    <a:pt x="5729802" y="267729"/>
-                  </a:lnTo>
-                  <a:lnTo>
-                    <a:pt x="5658179" y="261132"/>
-                  </a:lnTo>
-                  <a:lnTo>
-                    <a:pt x="5586557" y="254464"/>
-                  </a:lnTo>
-                  <a:lnTo>
-                    <a:pt x="5514934" y="247722"/>
-                  </a:lnTo>
-                  <a:lnTo>
-                    <a:pt x="5443311" y="240906"/>
-                  </a:lnTo>
-                  <a:lnTo>
-                    <a:pt x="5371689" y="234015"/>
-                  </a:lnTo>
-                  <a:lnTo>
-                    <a:pt x="5300066" y="227048"/>
-                  </a:lnTo>
-                  <a:lnTo>
-                    <a:pt x="5228444" y="220005"/>
-                  </a:lnTo>
-                  <a:lnTo>
-                    <a:pt x="5156821" y="212885"/>
-                  </a:lnTo>
-                  <a:lnTo>
-                    <a:pt x="5085199" y="205686"/>
-                  </a:lnTo>
-                  <a:lnTo>
-                    <a:pt x="5013576" y="198408"/>
-                  </a:lnTo>
-                  <a:lnTo>
-                    <a:pt x="4941954" y="191050"/>
-                  </a:lnTo>
-                  <a:lnTo>
-                    <a:pt x="4870331" y="183611"/>
-                  </a:lnTo>
-                  <a:lnTo>
-                    <a:pt x="4798709" y="176091"/>
-                  </a:lnTo>
-                  <a:lnTo>
-                    <a:pt x="4727086" y="168488"/>
-                  </a:lnTo>
-                  <a:lnTo>
-                    <a:pt x="4655464" y="160801"/>
-                  </a:lnTo>
-                  <a:lnTo>
-                    <a:pt x="4583841" y="153030"/>
-                  </a:lnTo>
-                  <a:lnTo>
-                    <a:pt x="4512219" y="145174"/>
-                  </a:lnTo>
-                  <a:lnTo>
-                    <a:pt x="4440596" y="137231"/>
-                  </a:lnTo>
-                  <a:lnTo>
-                    <a:pt x="4368974" y="129201"/>
-                  </a:lnTo>
-                  <a:lnTo>
-                    <a:pt x="4297351" y="121083"/>
-                  </a:lnTo>
-                  <a:lnTo>
-                    <a:pt x="4225729" y="112875"/>
-                  </a:lnTo>
-                  <a:lnTo>
-                    <a:pt x="4154106" y="104577"/>
-                  </a:lnTo>
-                  <a:lnTo>
-                    <a:pt x="4082483" y="96188"/>
-                  </a:lnTo>
-                  <a:lnTo>
-                    <a:pt x="4010861" y="87707"/>
-                  </a:lnTo>
-                  <a:lnTo>
-                    <a:pt x="3939238" y="79133"/>
-                  </a:lnTo>
-                  <a:lnTo>
-                    <a:pt x="3867616" y="70465"/>
-                  </a:lnTo>
-                  <a:lnTo>
-                    <a:pt x="3795993" y="61701"/>
-                  </a:lnTo>
-                  <a:lnTo>
-                    <a:pt x="3724371" y="52841"/>
-                  </a:lnTo>
-                  <a:lnTo>
-                    <a:pt x="3652748" y="43884"/>
-                  </a:lnTo>
-                  <a:lnTo>
-                    <a:pt x="3581126" y="34828"/>
-                  </a:lnTo>
-                  <a:lnTo>
-                    <a:pt x="3509503" y="25672"/>
-                  </a:lnTo>
-                  <a:lnTo>
-                    <a:pt x="3437881" y="16416"/>
-                  </a:lnTo>
-                  <a:lnTo>
-                    <a:pt x="3366258" y="7059"/>
+                    <a:pt x="7019007" y="380254"/>
+                  </a:lnTo>
+                  <a:lnTo>
+                    <a:pt x="6947385" y="374814"/>
+                  </a:lnTo>
+                  <a:lnTo>
+                    <a:pt x="6875762" y="369314"/>
+                  </a:lnTo>
+                  <a:lnTo>
+                    <a:pt x="6804139" y="363752"/>
+                  </a:lnTo>
+                  <a:lnTo>
+                    <a:pt x="6732517" y="358129"/>
+                  </a:lnTo>
+                  <a:lnTo>
+                    <a:pt x="6660894" y="352443"/>
+                  </a:lnTo>
+                  <a:lnTo>
+                    <a:pt x="6589272" y="346694"/>
+                  </a:lnTo>
+                  <a:lnTo>
+                    <a:pt x="6517649" y="340880"/>
+                  </a:lnTo>
+                  <a:lnTo>
+                    <a:pt x="6446027" y="335002"/>
+                  </a:lnTo>
+                  <a:lnTo>
+                    <a:pt x="6374404" y="329059"/>
+                  </a:lnTo>
+                  <a:lnTo>
+                    <a:pt x="6302782" y="323050"/>
+                  </a:lnTo>
+                  <a:lnTo>
+                    <a:pt x="6231159" y="316973"/>
+                  </a:lnTo>
+                  <a:lnTo>
+                    <a:pt x="6159537" y="310830"/>
+                  </a:lnTo>
+                  <a:lnTo>
+                    <a:pt x="6087914" y="304617"/>
+                  </a:lnTo>
+                  <a:lnTo>
+                    <a:pt x="6016292" y="298336"/>
+                  </a:lnTo>
+                  <a:lnTo>
+                    <a:pt x="5944669" y="291985"/>
+                  </a:lnTo>
+                  <a:lnTo>
+                    <a:pt x="5873047" y="285563"/>
+                  </a:lnTo>
+                  <a:lnTo>
+                    <a:pt x="5801424" y="279070"/>
+                  </a:lnTo>
+                  <a:lnTo>
+                    <a:pt x="5729802" y="272505"/>
+                  </a:lnTo>
+                  <a:lnTo>
+                    <a:pt x="5658179" y="265866"/>
+                  </a:lnTo>
+                  <a:lnTo>
+                    <a:pt x="5586557" y="259154"/>
+                  </a:lnTo>
+                  <a:lnTo>
+                    <a:pt x="5514934" y="252367"/>
+                  </a:lnTo>
+                  <a:lnTo>
+                    <a:pt x="5443311" y="245504"/>
+                  </a:lnTo>
+                  <a:lnTo>
+                    <a:pt x="5371689" y="238565"/>
+                  </a:lnTo>
+                  <a:lnTo>
+                    <a:pt x="5300066" y="231549"/>
+                  </a:lnTo>
+                  <a:lnTo>
+                    <a:pt x="5228444" y="224455"/>
+                  </a:lnTo>
+                  <a:lnTo>
+                    <a:pt x="5156821" y="217282"/>
+                  </a:lnTo>
+                  <a:lnTo>
+                    <a:pt x="5085199" y="210029"/>
+                  </a:lnTo>
+                  <a:lnTo>
+                    <a:pt x="5013576" y="202696"/>
+                  </a:lnTo>
+                  <a:lnTo>
+                    <a:pt x="4941954" y="195281"/>
+                  </a:lnTo>
+                  <a:lnTo>
+                    <a:pt x="4870331" y="187783"/>
+                  </a:lnTo>
+                  <a:lnTo>
+                    <a:pt x="4798709" y="180203"/>
+                  </a:lnTo>
+                  <a:lnTo>
+                    <a:pt x="4727086" y="172537"/>
+                  </a:lnTo>
+                  <a:lnTo>
+                    <a:pt x="4655464" y="164787"/>
+                  </a:lnTo>
+                  <a:lnTo>
+                    <a:pt x="4583841" y="156950"/>
+                  </a:lnTo>
+                  <a:lnTo>
+                    <a:pt x="4512219" y="149026"/>
+                  </a:lnTo>
+                  <a:lnTo>
+                    <a:pt x="4440596" y="141014"/>
+                  </a:lnTo>
+                  <a:lnTo>
+                    <a:pt x="4368974" y="132913"/>
+                  </a:lnTo>
+                  <a:lnTo>
+                    <a:pt x="4297351" y="124722"/>
+                  </a:lnTo>
+                  <a:lnTo>
+                    <a:pt x="4225729" y="116439"/>
+                  </a:lnTo>
+                  <a:lnTo>
+                    <a:pt x="4154106" y="108065"/>
+                  </a:lnTo>
+                  <a:lnTo>
+                    <a:pt x="4082483" y="99597"/>
+                  </a:lnTo>
+                  <a:lnTo>
+                    <a:pt x="4010861" y="91035"/>
+                  </a:lnTo>
+                  <a:lnTo>
+                    <a:pt x="3939238" y="82378"/>
+                  </a:lnTo>
+                  <a:lnTo>
+                    <a:pt x="3867616" y="73625"/>
+                  </a:lnTo>
+                  <a:lnTo>
+                    <a:pt x="3795993" y="64774"/>
+                  </a:lnTo>
+                  <a:lnTo>
+                    <a:pt x="3724371" y="55825"/>
+                  </a:lnTo>
+                  <a:lnTo>
+                    <a:pt x="3652748" y="46776"/>
+                  </a:lnTo>
+                  <a:lnTo>
+                    <a:pt x="3581126" y="37626"/>
+                  </a:lnTo>
+                  <a:lnTo>
+                    <a:pt x="3509503" y="28375"/>
+                  </a:lnTo>
+                  <a:lnTo>
+                    <a:pt x="3437881" y="19021"/>
+                  </a:lnTo>
+                  <a:lnTo>
+                    <a:pt x="3366258" y="9563"/>
                   </a:lnTo>
                   <a:lnTo>
                     <a:pt x="3294636" y="0"/>
                   </a:lnTo>
                   <a:lnTo>
-                    <a:pt x="3223013" y="20883"/>
-                  </a:lnTo>
-                  <a:lnTo>
-                    <a:pt x="3151391" y="41264"/>
-                  </a:lnTo>
-                  <a:lnTo>
-                    <a:pt x="3079768" y="61154"/>
-                  </a:lnTo>
-                  <a:lnTo>
-                    <a:pt x="3008146" y="80566"/>
-                  </a:lnTo>
-                  <a:lnTo>
-                    <a:pt x="2936523" y="99511"/>
-                  </a:lnTo>
-                  <a:lnTo>
-                    <a:pt x="2864901" y="118000"/>
-                  </a:lnTo>
-                  <a:lnTo>
-                    <a:pt x="2793278" y="136045"/>
-                  </a:lnTo>
-                  <a:lnTo>
-                    <a:pt x="2721655" y="153655"/>
-                  </a:lnTo>
-                  <a:lnTo>
-                    <a:pt x="2650033" y="170842"/>
-                  </a:lnTo>
-                  <a:lnTo>
-                    <a:pt x="2578410" y="187615"/>
-                  </a:lnTo>
-                  <a:lnTo>
-                    <a:pt x="2506788" y="203984"/>
-                  </a:lnTo>
-                  <a:lnTo>
-                    <a:pt x="2435165" y="219960"/>
-                  </a:lnTo>
-                  <a:lnTo>
-                    <a:pt x="2363543" y="235551"/>
-                  </a:lnTo>
-                  <a:lnTo>
-                    <a:pt x="2291920" y="250768"/>
-                  </a:lnTo>
-                  <a:lnTo>
-                    <a:pt x="2220298" y="265618"/>
-                  </a:lnTo>
-                  <a:lnTo>
-                    <a:pt x="2148675" y="280111"/>
-                  </a:lnTo>
-                  <a:lnTo>
-                    <a:pt x="2077053" y="294255"/>
-                  </a:lnTo>
-                  <a:lnTo>
-                    <a:pt x="2005430" y="308059"/>
-                  </a:lnTo>
-                  <a:lnTo>
-                    <a:pt x="1933808" y="321531"/>
-                  </a:lnTo>
-                  <a:lnTo>
-                    <a:pt x="1862185" y="334679"/>
-                  </a:lnTo>
-                  <a:lnTo>
-                    <a:pt x="1790563" y="347510"/>
-                  </a:lnTo>
-                  <a:lnTo>
-                    <a:pt x="1718940" y="360033"/>
-                  </a:lnTo>
-                  <a:lnTo>
-                    <a:pt x="1647318" y="372254"/>
-                  </a:lnTo>
-                  <a:lnTo>
-                    <a:pt x="1575695" y="384182"/>
-                  </a:lnTo>
-                  <a:lnTo>
-                    <a:pt x="1504073" y="395822"/>
-                  </a:lnTo>
-                  <a:lnTo>
-                    <a:pt x="1432450" y="407182"/>
-                  </a:lnTo>
-                  <a:lnTo>
-                    <a:pt x="1360827" y="418270"/>
-                  </a:lnTo>
-                  <a:lnTo>
-                    <a:pt x="1289205" y="429090"/>
-                  </a:lnTo>
-                  <a:lnTo>
-                    <a:pt x="1217582" y="439650"/>
-                  </a:lnTo>
-                  <a:lnTo>
-                    <a:pt x="1145960" y="449956"/>
-                  </a:lnTo>
-                  <a:lnTo>
-                    <a:pt x="1074337" y="460014"/>
-                  </a:lnTo>
-                  <a:lnTo>
-                    <a:pt x="1002715" y="469830"/>
-                  </a:lnTo>
-                  <a:lnTo>
-                    <a:pt x="931092" y="479410"/>
-                  </a:lnTo>
-                  <a:lnTo>
-                    <a:pt x="859470" y="488759"/>
-                  </a:lnTo>
-                  <a:lnTo>
-                    <a:pt x="787847" y="497884"/>
-                  </a:lnTo>
-                  <a:lnTo>
-                    <a:pt x="716225" y="506789"/>
-                  </a:lnTo>
-                  <a:lnTo>
-                    <a:pt x="644602" y="515479"/>
-                  </a:lnTo>
-                  <a:lnTo>
-                    <a:pt x="572980" y="523961"/>
-                  </a:lnTo>
-                  <a:lnTo>
-                    <a:pt x="501357" y="532238"/>
-                  </a:lnTo>
-                  <a:lnTo>
-                    <a:pt x="429735" y="540317"/>
-                  </a:lnTo>
-                  <a:lnTo>
-                    <a:pt x="358112" y="548201"/>
-                  </a:lnTo>
-                  <a:lnTo>
-                    <a:pt x="286490" y="555895"/>
-                  </a:lnTo>
-                  <a:lnTo>
-                    <a:pt x="214867" y="563405"/>
-                  </a:lnTo>
-                  <a:lnTo>
-                    <a:pt x="143245" y="570733"/>
-                  </a:lnTo>
-                  <a:lnTo>
-                    <a:pt x="71622" y="577886"/>
-                  </a:lnTo>
-                  <a:lnTo>
-                    <a:pt x="0" y="584866"/>
+                    <a:pt x="3223013" y="19621"/>
+                  </a:lnTo>
+                  <a:lnTo>
+                    <a:pt x="3151391" y="39971"/>
+                  </a:lnTo>
+                  <a:lnTo>
+                    <a:pt x="3079768" y="59833"/>
+                  </a:lnTo>
+                  <a:lnTo>
+                    <a:pt x="3008146" y="79220"/>
+                  </a:lnTo>
+                  <a:lnTo>
+                    <a:pt x="2936523" y="98142"/>
+                  </a:lnTo>
+                  <a:lnTo>
+                    <a:pt x="2864901" y="116611"/>
+                  </a:lnTo>
+                  <a:lnTo>
+                    <a:pt x="2793278" y="134638"/>
+                  </a:lnTo>
+                  <a:lnTo>
+                    <a:pt x="2721655" y="152233"/>
+                  </a:lnTo>
+                  <a:lnTo>
+                    <a:pt x="2650033" y="169406"/>
+                  </a:lnTo>
+                  <a:lnTo>
+                    <a:pt x="2578410" y="186168"/>
+                  </a:lnTo>
+                  <a:lnTo>
+                    <a:pt x="2506788" y="202529"/>
+                  </a:lnTo>
+                  <a:lnTo>
+                    <a:pt x="2435165" y="218498"/>
+                  </a:lnTo>
+                  <a:lnTo>
+                    <a:pt x="2363543" y="234084"/>
+                  </a:lnTo>
+                  <a:lnTo>
+                    <a:pt x="2291920" y="249298"/>
+                  </a:lnTo>
+                  <a:lnTo>
+                    <a:pt x="2220298" y="264147"/>
+                  </a:lnTo>
+                  <a:lnTo>
+                    <a:pt x="2148675" y="278640"/>
+                  </a:lnTo>
+                  <a:lnTo>
+                    <a:pt x="2077053" y="292786"/>
+                  </a:lnTo>
+                  <a:lnTo>
+                    <a:pt x="2005430" y="306593"/>
+                  </a:lnTo>
+                  <a:lnTo>
+                    <a:pt x="1933808" y="320070"/>
+                  </a:lnTo>
+                  <a:lnTo>
+                    <a:pt x="1862185" y="333224"/>
+                  </a:lnTo>
+                  <a:lnTo>
+                    <a:pt x="1790563" y="346062"/>
+                  </a:lnTo>
+                  <a:lnTo>
+                    <a:pt x="1718940" y="358594"/>
+                  </a:lnTo>
+                  <a:lnTo>
+                    <a:pt x="1647318" y="370825"/>
+                  </a:lnTo>
+                  <a:lnTo>
+                    <a:pt x="1575695" y="382763"/>
+                  </a:lnTo>
+                  <a:lnTo>
+                    <a:pt x="1504073" y="394415"/>
+                  </a:lnTo>
+                  <a:lnTo>
+                    <a:pt x="1432450" y="405789"/>
+                  </a:lnTo>
+                  <a:lnTo>
+                    <a:pt x="1360827" y="416890"/>
+                  </a:lnTo>
+                  <a:lnTo>
+                    <a:pt x="1289205" y="427725"/>
+                  </a:lnTo>
+                  <a:lnTo>
+                    <a:pt x="1217582" y="438300"/>
+                  </a:lnTo>
+                  <a:lnTo>
+                    <a:pt x="1145960" y="448622"/>
+                  </a:lnTo>
+                  <a:lnTo>
+                    <a:pt x="1074337" y="458697"/>
+                  </a:lnTo>
+                  <a:lnTo>
+                    <a:pt x="1002715" y="468531"/>
+                  </a:lnTo>
+                  <a:lnTo>
+                    <a:pt x="931092" y="478129"/>
+                  </a:lnTo>
+                  <a:lnTo>
+                    <a:pt x="859470" y="487498"/>
+                  </a:lnTo>
+                  <a:lnTo>
+                    <a:pt x="787847" y="496642"/>
+                  </a:lnTo>
+                  <a:lnTo>
+                    <a:pt x="716225" y="505567"/>
+                  </a:lnTo>
+                  <a:lnTo>
+                    <a:pt x="644602" y="514278"/>
+                  </a:lnTo>
+                  <a:lnTo>
+                    <a:pt x="572980" y="522780"/>
+                  </a:lnTo>
+                  <a:lnTo>
+                    <a:pt x="501357" y="531079"/>
+                  </a:lnTo>
+                  <a:lnTo>
+                    <a:pt x="429735" y="539179"/>
+                  </a:lnTo>
+                  <a:lnTo>
+                    <a:pt x="358112" y="547086"/>
+                  </a:lnTo>
+                  <a:lnTo>
+                    <a:pt x="286490" y="554803"/>
+                  </a:lnTo>
+                  <a:lnTo>
+                    <a:pt x="214867" y="562335"/>
+                  </a:lnTo>
+                  <a:lnTo>
+                    <a:pt x="143245" y="569686"/>
+                  </a:lnTo>
+                  <a:lnTo>
+                    <a:pt x="71622" y="576862"/>
+                  </a:lnTo>
+                  <a:lnTo>
+                    <a:pt x="0" y="583865"/>
                   </a:lnTo>
                 </a:path>
               </a:pathLst>
@@ -4240,309 +4240,309 @@
           </p:nvSpPr>
           <p:spPr>
             <a:xfrm>
-              <a:off x="1172049" y="4308617"/>
-              <a:ext cx="7090630" cy="602272"/>
+              <a:off x="1172049" y="4315682"/>
+              <a:ext cx="7090630" cy="591089"/>
             </a:xfrm>
             <a:custGeom>
               <a:avLst/>
               <a:pathLst>
-                <a:path w="7090630" h="602272">
+                <a:path w="7090630" h="591089">
                   <a:moveTo>
-                    <a:pt x="0" y="602272"/>
+                    <a:pt x="0" y="591089"/>
                   </a:moveTo>
                   <a:lnTo>
-                    <a:pt x="71622" y="597973"/>
-                  </a:lnTo>
-                  <a:lnTo>
-                    <a:pt x="143245" y="593646"/>
-                  </a:lnTo>
-                  <a:lnTo>
-                    <a:pt x="214867" y="589288"/>
-                  </a:lnTo>
-                  <a:lnTo>
-                    <a:pt x="286490" y="584902"/>
-                  </a:lnTo>
-                  <a:lnTo>
-                    <a:pt x="358112" y="580486"/>
-                  </a:lnTo>
-                  <a:lnTo>
-                    <a:pt x="429735" y="576041"/>
-                  </a:lnTo>
-                  <a:lnTo>
-                    <a:pt x="501357" y="571565"/>
-                  </a:lnTo>
-                  <a:lnTo>
-                    <a:pt x="572980" y="567059"/>
-                  </a:lnTo>
-                  <a:lnTo>
-                    <a:pt x="644602" y="562523"/>
-                  </a:lnTo>
-                  <a:lnTo>
-                    <a:pt x="716225" y="557957"/>
-                  </a:lnTo>
-                  <a:lnTo>
-                    <a:pt x="787847" y="553359"/>
-                  </a:lnTo>
-                  <a:lnTo>
-                    <a:pt x="859470" y="548731"/>
-                  </a:lnTo>
-                  <a:lnTo>
-                    <a:pt x="931092" y="544071"/>
-                  </a:lnTo>
-                  <a:lnTo>
-                    <a:pt x="1002715" y="539380"/>
-                  </a:lnTo>
-                  <a:lnTo>
-                    <a:pt x="1074337" y="534658"/>
-                  </a:lnTo>
-                  <a:lnTo>
-                    <a:pt x="1145960" y="529904"/>
-                  </a:lnTo>
-                  <a:lnTo>
-                    <a:pt x="1217582" y="525117"/>
-                  </a:lnTo>
-                  <a:lnTo>
-                    <a:pt x="1289205" y="520299"/>
-                  </a:lnTo>
-                  <a:lnTo>
-                    <a:pt x="1360827" y="515448"/>
-                  </a:lnTo>
-                  <a:lnTo>
-                    <a:pt x="1432450" y="510564"/>
-                  </a:lnTo>
-                  <a:lnTo>
-                    <a:pt x="1504073" y="505648"/>
-                  </a:lnTo>
-                  <a:lnTo>
-                    <a:pt x="1575695" y="500698"/>
-                  </a:lnTo>
-                  <a:lnTo>
-                    <a:pt x="1647318" y="495715"/>
-                  </a:lnTo>
-                  <a:lnTo>
-                    <a:pt x="1718940" y="490698"/>
-                  </a:lnTo>
-                  <a:lnTo>
-                    <a:pt x="1790563" y="485648"/>
-                  </a:lnTo>
-                  <a:lnTo>
-                    <a:pt x="1862185" y="480564"/>
-                  </a:lnTo>
-                  <a:lnTo>
-                    <a:pt x="1933808" y="475445"/>
-                  </a:lnTo>
-                  <a:lnTo>
-                    <a:pt x="2005430" y="470292"/>
-                  </a:lnTo>
-                  <a:lnTo>
-                    <a:pt x="2077053" y="465104"/>
-                  </a:lnTo>
-                  <a:lnTo>
-                    <a:pt x="2148675" y="459882"/>
-                  </a:lnTo>
-                  <a:lnTo>
-                    <a:pt x="2220298" y="454624"/>
-                  </a:lnTo>
-                  <a:lnTo>
-                    <a:pt x="2291920" y="449330"/>
-                  </a:lnTo>
-                  <a:lnTo>
-                    <a:pt x="2363543" y="444001"/>
-                  </a:lnTo>
-                  <a:lnTo>
-                    <a:pt x="2435165" y="438637"/>
-                  </a:lnTo>
-                  <a:lnTo>
-                    <a:pt x="2506788" y="433236"/>
-                  </a:lnTo>
-                  <a:lnTo>
-                    <a:pt x="2578410" y="427798"/>
-                  </a:lnTo>
-                  <a:lnTo>
-                    <a:pt x="2650033" y="422324"/>
-                  </a:lnTo>
-                  <a:lnTo>
-                    <a:pt x="2721655" y="416814"/>
-                  </a:lnTo>
-                  <a:lnTo>
-                    <a:pt x="2793278" y="411266"/>
-                  </a:lnTo>
-                  <a:lnTo>
-                    <a:pt x="2864901" y="405680"/>
-                  </a:lnTo>
-                  <a:lnTo>
-                    <a:pt x="2936523" y="400057"/>
-                  </a:lnTo>
-                  <a:lnTo>
-                    <a:pt x="3008146" y="394397"/>
-                  </a:lnTo>
-                  <a:lnTo>
-                    <a:pt x="3079768" y="388698"/>
-                  </a:lnTo>
-                  <a:lnTo>
-                    <a:pt x="3151391" y="382960"/>
-                  </a:lnTo>
-                  <a:lnTo>
-                    <a:pt x="3223013" y="377184"/>
-                  </a:lnTo>
-                  <a:lnTo>
-                    <a:pt x="3294636" y="371370"/>
-                  </a:lnTo>
-                  <a:lnTo>
-                    <a:pt x="3366258" y="365516"/>
-                  </a:lnTo>
-                  <a:lnTo>
-                    <a:pt x="3437881" y="359622"/>
-                  </a:lnTo>
-                  <a:lnTo>
-                    <a:pt x="3509503" y="353689"/>
-                  </a:lnTo>
-                  <a:lnTo>
-                    <a:pt x="3581126" y="347716"/>
-                  </a:lnTo>
-                  <a:lnTo>
-                    <a:pt x="3652748" y="341703"/>
-                  </a:lnTo>
-                  <a:lnTo>
-                    <a:pt x="3724371" y="335649"/>
-                  </a:lnTo>
-                  <a:lnTo>
-                    <a:pt x="3795993" y="329554"/>
-                  </a:lnTo>
-                  <a:lnTo>
-                    <a:pt x="3867616" y="323419"/>
-                  </a:lnTo>
-                  <a:lnTo>
-                    <a:pt x="3939238" y="317242"/>
-                  </a:lnTo>
-                  <a:lnTo>
-                    <a:pt x="4010861" y="311023"/>
-                  </a:lnTo>
-                  <a:lnTo>
-                    <a:pt x="4082483" y="304763"/>
-                  </a:lnTo>
-                  <a:lnTo>
-                    <a:pt x="4154106" y="298460"/>
-                  </a:lnTo>
-                  <a:lnTo>
-                    <a:pt x="4225729" y="292115"/>
-                  </a:lnTo>
-                  <a:lnTo>
-                    <a:pt x="4297351" y="285727"/>
-                  </a:lnTo>
-                  <a:lnTo>
-                    <a:pt x="4368974" y="279297"/>
-                  </a:lnTo>
-                  <a:lnTo>
-                    <a:pt x="4440596" y="272823"/>
-                  </a:lnTo>
-                  <a:lnTo>
-                    <a:pt x="4512219" y="266305"/>
-                  </a:lnTo>
-                  <a:lnTo>
-                    <a:pt x="4583841" y="259743"/>
-                  </a:lnTo>
-                  <a:lnTo>
-                    <a:pt x="4655464" y="253138"/>
-                  </a:lnTo>
-                  <a:lnTo>
-                    <a:pt x="4727086" y="246487"/>
-                  </a:lnTo>
-                  <a:lnTo>
-                    <a:pt x="4798709" y="239792"/>
-                  </a:lnTo>
-                  <a:lnTo>
-                    <a:pt x="4870331" y="233052"/>
-                  </a:lnTo>
-                  <a:lnTo>
-                    <a:pt x="4941954" y="226267"/>
-                  </a:lnTo>
-                  <a:lnTo>
-                    <a:pt x="5013576" y="219435"/>
-                  </a:lnTo>
-                  <a:lnTo>
-                    <a:pt x="5085199" y="212558"/>
-                  </a:lnTo>
-                  <a:lnTo>
-                    <a:pt x="5156821" y="205635"/>
-                  </a:lnTo>
-                  <a:lnTo>
-                    <a:pt x="5228444" y="198664"/>
-                  </a:lnTo>
-                  <a:lnTo>
-                    <a:pt x="5300066" y="191647"/>
-                  </a:lnTo>
-                  <a:lnTo>
-                    <a:pt x="5371689" y="184583"/>
-                  </a:lnTo>
-                  <a:lnTo>
-                    <a:pt x="5443311" y="177471"/>
-                  </a:lnTo>
-                  <a:lnTo>
-                    <a:pt x="5514934" y="170311"/>
-                  </a:lnTo>
-                  <a:lnTo>
-                    <a:pt x="5586557" y="163103"/>
-                  </a:lnTo>
-                  <a:lnTo>
-                    <a:pt x="5658179" y="155846"/>
-                  </a:lnTo>
-                  <a:lnTo>
-                    <a:pt x="5729802" y="148541"/>
-                  </a:lnTo>
-                  <a:lnTo>
-                    <a:pt x="5801424" y="141186"/>
-                  </a:lnTo>
-                  <a:lnTo>
-                    <a:pt x="5873047" y="133782"/>
-                  </a:lnTo>
-                  <a:lnTo>
-                    <a:pt x="5944669" y="126328"/>
-                  </a:lnTo>
-                  <a:lnTo>
-                    <a:pt x="6016292" y="118824"/>
-                  </a:lnTo>
-                  <a:lnTo>
-                    <a:pt x="6087914" y="111269"/>
-                  </a:lnTo>
-                  <a:lnTo>
-                    <a:pt x="6159537" y="103663"/>
-                  </a:lnTo>
-                  <a:lnTo>
-                    <a:pt x="6231159" y="96006"/>
-                  </a:lnTo>
-                  <a:lnTo>
-                    <a:pt x="6302782" y="88298"/>
-                  </a:lnTo>
-                  <a:lnTo>
-                    <a:pt x="6374404" y="80537"/>
-                  </a:lnTo>
-                  <a:lnTo>
-                    <a:pt x="6446027" y="72724"/>
-                  </a:lnTo>
-                  <a:lnTo>
-                    <a:pt x="6517649" y="64859"/>
-                  </a:lnTo>
-                  <a:lnTo>
-                    <a:pt x="6589272" y="56941"/>
-                  </a:lnTo>
-                  <a:lnTo>
-                    <a:pt x="6660894" y="48969"/>
-                  </a:lnTo>
-                  <a:lnTo>
-                    <a:pt x="6732517" y="40944"/>
-                  </a:lnTo>
-                  <a:lnTo>
-                    <a:pt x="6804139" y="32865"/>
-                  </a:lnTo>
-                  <a:lnTo>
-                    <a:pt x="6875762" y="24731"/>
-                  </a:lnTo>
-                  <a:lnTo>
-                    <a:pt x="6947385" y="16542"/>
-                  </a:lnTo>
-                  <a:lnTo>
-                    <a:pt x="7019007" y="8299"/>
+                    <a:pt x="71622" y="586842"/>
+                  </a:lnTo>
+                  <a:lnTo>
+                    <a:pt x="143245" y="582566"/>
+                  </a:lnTo>
+                  <a:lnTo>
+                    <a:pt x="214867" y="578263"/>
+                  </a:lnTo>
+                  <a:lnTo>
+                    <a:pt x="286490" y="573931"/>
+                  </a:lnTo>
+                  <a:lnTo>
+                    <a:pt x="358112" y="569570"/>
+                  </a:lnTo>
+                  <a:lnTo>
+                    <a:pt x="429735" y="565180"/>
+                  </a:lnTo>
+                  <a:lnTo>
+                    <a:pt x="501357" y="560762"/>
+                  </a:lnTo>
+                  <a:lnTo>
+                    <a:pt x="572980" y="556314"/>
+                  </a:lnTo>
+                  <a:lnTo>
+                    <a:pt x="644602" y="551836"/>
+                  </a:lnTo>
+                  <a:lnTo>
+                    <a:pt x="716225" y="547330"/>
+                  </a:lnTo>
+                  <a:lnTo>
+                    <a:pt x="787847" y="542793"/>
+                  </a:lnTo>
+                  <a:lnTo>
+                    <a:pt x="859470" y="538226"/>
+                  </a:lnTo>
+                  <a:lnTo>
+                    <a:pt x="931092" y="533629"/>
+                  </a:lnTo>
+                  <a:lnTo>
+                    <a:pt x="1002715" y="529002"/>
+                  </a:lnTo>
+                  <a:lnTo>
+                    <a:pt x="1074337" y="524344"/>
+                  </a:lnTo>
+                  <a:lnTo>
+                    <a:pt x="1145960" y="519656"/>
+                  </a:lnTo>
+                  <a:lnTo>
+                    <a:pt x="1217582" y="514936"/>
+                  </a:lnTo>
+                  <a:lnTo>
+                    <a:pt x="1289205" y="510185"/>
+                  </a:lnTo>
+                  <a:lnTo>
+                    <a:pt x="1360827" y="505403"/>
+                  </a:lnTo>
+                  <a:lnTo>
+                    <a:pt x="1432450" y="500589"/>
+                  </a:lnTo>
+                  <a:lnTo>
+                    <a:pt x="1504073" y="495744"/>
+                  </a:lnTo>
+                  <a:lnTo>
+                    <a:pt x="1575695" y="490866"/>
+                  </a:lnTo>
+                  <a:lnTo>
+                    <a:pt x="1647318" y="485956"/>
+                  </a:lnTo>
+                  <a:lnTo>
+                    <a:pt x="1718940" y="481014"/>
+                  </a:lnTo>
+                  <a:lnTo>
+                    <a:pt x="1790563" y="476039"/>
+                  </a:lnTo>
+                  <a:lnTo>
+                    <a:pt x="1862185" y="471031"/>
+                  </a:lnTo>
+                  <a:lnTo>
+                    <a:pt x="1933808" y="465990"/>
+                  </a:lnTo>
+                  <a:lnTo>
+                    <a:pt x="2005430" y="460915"/>
+                  </a:lnTo>
+                  <a:lnTo>
+                    <a:pt x="2077053" y="455807"/>
+                  </a:lnTo>
+                  <a:lnTo>
+                    <a:pt x="2148675" y="450665"/>
+                  </a:lnTo>
+                  <a:lnTo>
+                    <a:pt x="2220298" y="445490"/>
+                  </a:lnTo>
+                  <a:lnTo>
+                    <a:pt x="2291920" y="440280"/>
+                  </a:lnTo>
+                  <a:lnTo>
+                    <a:pt x="2363543" y="435035"/>
+                  </a:lnTo>
+                  <a:lnTo>
+                    <a:pt x="2435165" y="429756"/>
+                  </a:lnTo>
+                  <a:lnTo>
+                    <a:pt x="2506788" y="424442"/>
+                  </a:lnTo>
+                  <a:lnTo>
+                    <a:pt x="2578410" y="419093"/>
+                  </a:lnTo>
+                  <a:lnTo>
+                    <a:pt x="2650033" y="413709"/>
+                  </a:lnTo>
+                  <a:lnTo>
+                    <a:pt x="2721655" y="408289"/>
+                  </a:lnTo>
+                  <a:lnTo>
+                    <a:pt x="2793278" y="402833"/>
+                  </a:lnTo>
+                  <a:lnTo>
+                    <a:pt x="2864901" y="397341"/>
+                  </a:lnTo>
+                  <a:lnTo>
+                    <a:pt x="2936523" y="391813"/>
+                  </a:lnTo>
+                  <a:lnTo>
+                    <a:pt x="3008146" y="386248"/>
+                  </a:lnTo>
+                  <a:lnTo>
+                    <a:pt x="3079768" y="380646"/>
+                  </a:lnTo>
+                  <a:lnTo>
+                    <a:pt x="3151391" y="375008"/>
+                  </a:lnTo>
+                  <a:lnTo>
+                    <a:pt x="3223013" y="369332"/>
+                  </a:lnTo>
+                  <a:lnTo>
+                    <a:pt x="3294636" y="363618"/>
+                  </a:lnTo>
+                  <a:lnTo>
+                    <a:pt x="3366258" y="357867"/>
+                  </a:lnTo>
+                  <a:lnTo>
+                    <a:pt x="3437881" y="352078"/>
+                  </a:lnTo>
+                  <a:lnTo>
+                    <a:pt x="3509503" y="346250"/>
+                  </a:lnTo>
+                  <a:lnTo>
+                    <a:pt x="3581126" y="340384"/>
+                  </a:lnTo>
+                  <a:lnTo>
+                    <a:pt x="3652748" y="334480"/>
+                  </a:lnTo>
+                  <a:lnTo>
+                    <a:pt x="3724371" y="328536"/>
+                  </a:lnTo>
+                  <a:lnTo>
+                    <a:pt x="3795993" y="322553"/>
+                  </a:lnTo>
+                  <a:lnTo>
+                    <a:pt x="3867616" y="316530"/>
+                  </a:lnTo>
+                  <a:lnTo>
+                    <a:pt x="3939238" y="310467"/>
+                  </a:lnTo>
+                  <a:lnTo>
+                    <a:pt x="4010861" y="304365"/>
+                  </a:lnTo>
+                  <a:lnTo>
+                    <a:pt x="4082483" y="298222"/>
+                  </a:lnTo>
+                  <a:lnTo>
+                    <a:pt x="4154106" y="292038"/>
+                  </a:lnTo>
+                  <a:lnTo>
+                    <a:pt x="4225729" y="285814"/>
+                  </a:lnTo>
+                  <a:lnTo>
+                    <a:pt x="4297351" y="279548"/>
+                  </a:lnTo>
+                  <a:lnTo>
+                    <a:pt x="4368974" y="273241"/>
+                  </a:lnTo>
+                  <a:lnTo>
+                    <a:pt x="4440596" y="266892"/>
+                  </a:lnTo>
+                  <a:lnTo>
+                    <a:pt x="4512219" y="260502"/>
+                  </a:lnTo>
+                  <a:lnTo>
+                    <a:pt x="4583841" y="254069"/>
+                  </a:lnTo>
+                  <a:lnTo>
+                    <a:pt x="4655464" y="247593"/>
+                  </a:lnTo>
+                  <a:lnTo>
+                    <a:pt x="4727086" y="241075"/>
+                  </a:lnTo>
+                  <a:lnTo>
+                    <a:pt x="4798709" y="234514"/>
+                  </a:lnTo>
+                  <a:lnTo>
+                    <a:pt x="4870331" y="227909"/>
+                  </a:lnTo>
+                  <a:lnTo>
+                    <a:pt x="4941954" y="221260"/>
+                  </a:lnTo>
+                  <a:lnTo>
+                    <a:pt x="5013576" y="214568"/>
+                  </a:lnTo>
+                  <a:lnTo>
+                    <a:pt x="5085199" y="207831"/>
+                  </a:lnTo>
+                  <a:lnTo>
+                    <a:pt x="5156821" y="201050"/>
+                  </a:lnTo>
+                  <a:lnTo>
+                    <a:pt x="5228444" y="194224"/>
+                  </a:lnTo>
+                  <a:lnTo>
+                    <a:pt x="5300066" y="187353"/>
+                  </a:lnTo>
+                  <a:lnTo>
+                    <a:pt x="5371689" y="180436"/>
+                  </a:lnTo>
+                  <a:lnTo>
+                    <a:pt x="5443311" y="173474"/>
+                  </a:lnTo>
+                  <a:lnTo>
+                    <a:pt x="5514934" y="166466"/>
+                  </a:lnTo>
+                  <a:lnTo>
+                    <a:pt x="5586557" y="159411"/>
+                  </a:lnTo>
+                  <a:lnTo>
+                    <a:pt x="5658179" y="152310"/>
+                  </a:lnTo>
+                  <a:lnTo>
+                    <a:pt x="5729802" y="145162"/>
+                  </a:lnTo>
+                  <a:lnTo>
+                    <a:pt x="5801424" y="137966"/>
+                  </a:lnTo>
+                  <a:lnTo>
+                    <a:pt x="5873047" y="130723"/>
+                  </a:lnTo>
+                  <a:lnTo>
+                    <a:pt x="5944669" y="123432"/>
+                  </a:lnTo>
+                  <a:lnTo>
+                    <a:pt x="6016292" y="116093"/>
+                  </a:lnTo>
+                  <a:lnTo>
+                    <a:pt x="6087914" y="108705"/>
+                  </a:lnTo>
+                  <a:lnTo>
+                    <a:pt x="6159537" y="101269"/>
+                  </a:lnTo>
+                  <a:lnTo>
+                    <a:pt x="6231159" y="93783"/>
+                  </a:lnTo>
+                  <a:lnTo>
+                    <a:pt x="6302782" y="86248"/>
+                  </a:lnTo>
+                  <a:lnTo>
+                    <a:pt x="6374404" y="78663"/>
+                  </a:lnTo>
+                  <a:lnTo>
+                    <a:pt x="6446027" y="71028"/>
+                  </a:lnTo>
+                  <a:lnTo>
+                    <a:pt x="6517649" y="63342"/>
+                  </a:lnTo>
+                  <a:lnTo>
+                    <a:pt x="6589272" y="55606"/>
+                  </a:lnTo>
+                  <a:lnTo>
+                    <a:pt x="6660894" y="47818"/>
+                  </a:lnTo>
+                  <a:lnTo>
+                    <a:pt x="6732517" y="39979"/>
+                  </a:lnTo>
+                  <a:lnTo>
+                    <a:pt x="6804139" y="32088"/>
+                  </a:lnTo>
+                  <a:lnTo>
+                    <a:pt x="6875762" y="24145"/>
+                  </a:lnTo>
+                  <a:lnTo>
+                    <a:pt x="6947385" y="16150"/>
+                  </a:lnTo>
+                  <a:lnTo>
+                    <a:pt x="7019007" y="8101"/>
                   </a:lnTo>
                   <a:lnTo>
                     <a:pt x="7090630" y="0"/>
@@ -4617,7 +4617,7 @@
           </p:nvSpPr>
           <p:spPr>
             <a:xfrm>
-              <a:off x="4472293" y="1896563"/>
+              <a:off x="4463824" y="1896563"/>
               <a:ext cx="0" cy="3826579"/>
             </a:xfrm>
             <a:custGeom>
@@ -4890,7 +4890,7 @@
           </p:nvSpPr>
           <p:spPr>
             <a:xfrm>
-              <a:off x="2004858" y="5785772"/>
+              <a:off x="2005445" y="5785772"/>
               <a:ext cx="223753" cy="80101"/>
             </a:xfrm>
             <a:prstGeom prst="rect">
@@ -4936,7 +4936,7 @@
           </p:nvSpPr>
           <p:spPr>
             <a:xfrm>
-              <a:off x="4499764" y="5785772"/>
+              <a:off x="4497209" y="5785772"/>
               <a:ext cx="62179" cy="80101"/>
             </a:xfrm>
             <a:prstGeom prst="rect">
@@ -4982,7 +4982,7 @@
           </p:nvSpPr>
           <p:spPr>
             <a:xfrm>
-              <a:off x="6851704" y="5785772"/>
+              <a:off x="6846007" y="5785772"/>
               <a:ext cx="186537" cy="80101"/>
             </a:xfrm>
             <a:prstGeom prst="rect">
